--- a/Lectures/Lecture 09.2 AIC.pptx
+++ b/Lectures/Lecture 09.2 AIC.pptx
@@ -5,7 +5,7 @@
     <p:sldMasterId id="2147483660" r:id="rId1"/>
   </p:sldMasterIdLst>
   <p:notesMasterIdLst>
-    <p:notesMasterId r:id="rId14"/>
+    <p:notesMasterId r:id="rId15"/>
   </p:notesMasterIdLst>
   <p:sldIdLst>
     <p:sldId id="256" r:id="rId2"/>
@@ -18,8 +18,9 @@
     <p:sldId id="316" r:id="rId9"/>
     <p:sldId id="317" r:id="rId10"/>
     <p:sldId id="315" r:id="rId11"/>
-    <p:sldId id="325" r:id="rId12"/>
-    <p:sldId id="318" r:id="rId13"/>
+    <p:sldId id="330" r:id="rId12"/>
+    <p:sldId id="325" r:id="rId13"/>
+    <p:sldId id="318" r:id="rId14"/>
   </p:sldIdLst>
   <p:sldSz cx="12192000" cy="6858000"/>
   <p:notesSz cx="6858000" cy="9144000"/>
@@ -133,6 +134,7 @@
             <p14:sldId id="316"/>
             <p14:sldId id="317"/>
             <p14:sldId id="315"/>
+            <p14:sldId id="330"/>
             <p14:sldId id="325"/>
             <p14:sldId id="318"/>
           </p14:sldIdLst>
@@ -228,7 +230,7 @@
           <a:p>
             <a:fld id="{E77E2432-6654-47D3-BA2E-C79365803F14}" type="datetimeFigureOut">
               <a:rPr lang="en-GB" smtClean="0"/>
-              <a:t>08/08/2024</a:t>
+              <a:t>12/09/2024</a:t>
             </a:fld>
             <a:endParaRPr lang="en-GB"/>
           </a:p>
@@ -580,6 +582,90 @@
 </p:notes>
 </file>
 
+<file path=ppt/notesSlides/notesSlide2.xml><?xml version="1.0" encoding="utf-8"?>
+<p:notes xmlns:a="http://schemas.openxmlformats.org/drawingml/2006/main" xmlns:r="http://schemas.openxmlformats.org/officeDocument/2006/relationships" xmlns:p="http://schemas.openxmlformats.org/presentationml/2006/main">
+  <p:cSld>
+    <p:spTree>
+      <p:nvGrpSpPr>
+        <p:cNvPr id="1" name=""/>
+        <p:cNvGrpSpPr/>
+        <p:nvPr/>
+      </p:nvGrpSpPr>
+      <p:grpSpPr>
+        <a:xfrm>
+          <a:off x="0" y="0"/>
+          <a:ext cx="0" cy="0"/>
+          <a:chOff x="0" y="0"/>
+          <a:chExt cx="0" cy="0"/>
+        </a:xfrm>
+      </p:grpSpPr>
+      <p:sp>
+        <p:nvSpPr>
+          <p:cNvPr id="2" name="Slide Image Placeholder 1"/>
+          <p:cNvSpPr>
+            <a:spLocks noGrp="1" noRot="1" noChangeAspect="1"/>
+          </p:cNvSpPr>
+          <p:nvPr>
+            <p:ph type="sldImg"/>
+          </p:nvPr>
+        </p:nvSpPr>
+        <p:spPr/>
+      </p:sp>
+      <p:sp>
+        <p:nvSpPr>
+          <p:cNvPr id="3" name="Notes Placeholder 2"/>
+          <p:cNvSpPr>
+            <a:spLocks noGrp="1"/>
+          </p:cNvSpPr>
+          <p:nvPr>
+            <p:ph type="body" idx="1"/>
+          </p:nvPr>
+        </p:nvSpPr>
+        <p:spPr/>
+        <p:txBody>
+          <a:bodyPr/>
+          <a:lstStyle/>
+          <a:p>
+            <a:endParaRPr lang="en-GB" dirty="0"/>
+          </a:p>
+        </p:txBody>
+      </p:sp>
+      <p:sp>
+        <p:nvSpPr>
+          <p:cNvPr id="4" name="Slide Number Placeholder 3"/>
+          <p:cNvSpPr>
+            <a:spLocks noGrp="1"/>
+          </p:cNvSpPr>
+          <p:nvPr>
+            <p:ph type="sldNum" sz="quarter" idx="5"/>
+          </p:nvPr>
+        </p:nvSpPr>
+        <p:spPr/>
+        <p:txBody>
+          <a:bodyPr/>
+          <a:lstStyle/>
+          <a:p>
+            <a:fld id="{8B4A1917-8758-4A60-BF7C-DAA43A92293D}" type="slidenum">
+              <a:rPr lang="en-GB" smtClean="0"/>
+              <a:t>11</a:t>
+            </a:fld>
+            <a:endParaRPr lang="en-GB"/>
+          </a:p>
+        </p:txBody>
+      </p:sp>
+    </p:spTree>
+    <p:extLst>
+      <p:ext uri="{BB962C8B-B14F-4D97-AF65-F5344CB8AC3E}">
+        <p14:creationId xmlns:p14="http://schemas.microsoft.com/office/powerpoint/2010/main" val="4160133818"/>
+      </p:ext>
+    </p:extLst>
+  </p:cSld>
+  <p:clrMapOvr>
+    <a:masterClrMapping/>
+  </p:clrMapOvr>
+</p:notes>
+</file>
+
 <file path=ppt/slideLayouts/slideLayout1.xml><?xml version="1.0" encoding="utf-8"?>
 <p:sldLayout xmlns:a="http://schemas.openxmlformats.org/drawingml/2006/main" xmlns:r="http://schemas.openxmlformats.org/officeDocument/2006/relationships" xmlns:p="http://schemas.openxmlformats.org/presentationml/2006/main" preserve="1">
   <p:cSld name="Title Slide">
@@ -921,7 +1007,7 @@
           <a:p>
             <a:fld id="{BF46FFCA-D54E-40C3-ADD4-34D72280AA8D}" type="datetimeFigureOut">
               <a:rPr lang="en-GB" smtClean="0"/>
-              <a:t>08/08/2024</a:t>
+              <a:t>12/09/2024</a:t>
             </a:fld>
             <a:endParaRPr lang="en-GB"/>
           </a:p>
@@ -1131,7 +1217,7 @@
           <a:p>
             <a:fld id="{BF46FFCA-D54E-40C3-ADD4-34D72280AA8D}" type="datetimeFigureOut">
               <a:rPr lang="en-GB" smtClean="0"/>
-              <a:t>08/08/2024</a:t>
+              <a:t>12/09/2024</a:t>
             </a:fld>
             <a:endParaRPr lang="en-GB"/>
           </a:p>
@@ -1353,7 +1439,7 @@
           <a:p>
             <a:fld id="{BF46FFCA-D54E-40C3-ADD4-34D72280AA8D}" type="datetimeFigureOut">
               <a:rPr lang="en-GB" smtClean="0"/>
-              <a:t>08/08/2024</a:t>
+              <a:t>12/09/2024</a:t>
             </a:fld>
             <a:endParaRPr lang="en-GB"/>
           </a:p>
@@ -1553,7 +1639,7 @@
           <a:p>
             <a:fld id="{D46F7676-C212-4803-93A5-304A74E7C3F6}" type="datetimeFigureOut">
               <a:rPr lang="en-GB" smtClean="0"/>
-              <a:t>08/08/2024</a:t>
+              <a:t>12/09/2024</a:t>
             </a:fld>
             <a:endParaRPr lang="en-GB"/>
           </a:p>
@@ -2492,7 +2578,7 @@
           <a:p>
             <a:fld id="{BF46FFCA-D54E-40C3-ADD4-34D72280AA8D}" type="datetimeFigureOut">
               <a:rPr lang="en-GB" smtClean="0"/>
-              <a:t>08/08/2024</a:t>
+              <a:t>12/09/2024</a:t>
             </a:fld>
             <a:endParaRPr lang="en-GB"/>
           </a:p>
@@ -2634,7 +2720,7 @@
           <a:p>
             <a:fld id="{BF46FFCA-D54E-40C3-ADD4-34D72280AA8D}" type="datetimeFigureOut">
               <a:rPr lang="en-GB" smtClean="0"/>
-              <a:t>08/08/2024</a:t>
+              <a:t>12/09/2024</a:t>
             </a:fld>
             <a:endParaRPr lang="en-GB"/>
           </a:p>
@@ -2747,7 +2833,7 @@
           <a:p>
             <a:fld id="{BF46FFCA-D54E-40C3-ADD4-34D72280AA8D}" type="datetimeFigureOut">
               <a:rPr lang="en-GB" smtClean="0"/>
-              <a:t>08/08/2024</a:t>
+              <a:t>12/09/2024</a:t>
             </a:fld>
             <a:endParaRPr lang="en-GB"/>
           </a:p>
@@ -3060,7 +3146,7 @@
           <a:p>
             <a:fld id="{BF46FFCA-D54E-40C3-ADD4-34D72280AA8D}" type="datetimeFigureOut">
               <a:rPr lang="en-GB" smtClean="0"/>
-              <a:t>08/08/2024</a:t>
+              <a:t>12/09/2024</a:t>
             </a:fld>
             <a:endParaRPr lang="en-GB"/>
           </a:p>
@@ -3353,7 +3439,7 @@
           <a:p>
             <a:fld id="{BF46FFCA-D54E-40C3-ADD4-34D72280AA8D}" type="datetimeFigureOut">
               <a:rPr lang="en-GB" smtClean="0"/>
-              <a:t>08/08/2024</a:t>
+              <a:t>12/09/2024</a:t>
             </a:fld>
             <a:endParaRPr lang="en-GB"/>
           </a:p>
@@ -3596,7 +3682,7 @@
           <a:p>
             <a:fld id="{BF46FFCA-D54E-40C3-ADD4-34D72280AA8D}" type="datetimeFigureOut">
               <a:rPr lang="en-GB" smtClean="0"/>
-              <a:t>08/08/2024</a:t>
+              <a:t>12/09/2024</a:t>
             </a:fld>
             <a:endParaRPr lang="en-GB"/>
           </a:p>
@@ -4081,6 +4167,18 @@
   <p:clrMapOvr>
     <a:masterClrMapping/>
   </p:clrMapOvr>
+  <mc:AlternateContent xmlns:mc="http://schemas.openxmlformats.org/markup-compatibility/2006" xmlns:p14="http://schemas.microsoft.com/office/powerpoint/2010/main">
+    <mc:Choice Requires="p14">
+      <p:transition spd="med" p14:dur="700">
+        <p:fade/>
+      </p:transition>
+    </mc:Choice>
+    <mc:Fallback xmlns="">
+      <p:transition spd="med">
+        <p:fade/>
+      </p:transition>
+    </mc:Fallback>
+  </mc:AlternateContent>
 </p:sld>
 </file>
 
@@ -4292,6 +4390,18 @@
   <p:clrMapOvr>
     <a:masterClrMapping/>
   </p:clrMapOvr>
+  <mc:AlternateContent xmlns:mc="http://schemas.openxmlformats.org/markup-compatibility/2006" xmlns:p14="http://schemas.microsoft.com/office/powerpoint/2010/main">
+    <mc:Choice Requires="p14">
+      <p:transition spd="med" p14:dur="700">
+        <p:fade/>
+      </p:transition>
+    </mc:Choice>
+    <mc:Fallback xmlns="">
+      <p:transition spd="med">
+        <p:fade/>
+      </p:transition>
+    </mc:Fallback>
+  </mc:AlternateContent>
   <p:timing>
     <p:tnLst>
       <p:par>
@@ -4636,6 +4746,511 @@
           <p:cNvPr id="2" name="Title 1">
             <a:extLst>
               <a:ext uri="{FF2B5EF4-FFF2-40B4-BE49-F238E27FC236}">
+                <a16:creationId xmlns:a16="http://schemas.microsoft.com/office/drawing/2014/main" id="{CFEAF21E-929F-9100-9565-69DA9242B0C9}"/>
+              </a:ext>
+            </a:extLst>
+          </p:cNvPr>
+          <p:cNvSpPr>
+            <a:spLocks noGrp="1"/>
+          </p:cNvSpPr>
+          <p:nvPr>
+            <p:ph type="title"/>
+          </p:nvPr>
+        </p:nvSpPr>
+        <p:spPr/>
+        <p:txBody>
+          <a:bodyPr/>
+          <a:lstStyle/>
+          <a:p>
+            <a:r>
+              <a:rPr lang="en-GB" dirty="0"/>
+              <a:t>What does “best” mean?</a:t>
+            </a:r>
+          </a:p>
+        </p:txBody>
+      </p:sp>
+      <p:sp>
+        <p:nvSpPr>
+          <p:cNvPr id="3" name="Content Placeholder 2">
+            <a:extLst>
+              <a:ext uri="{FF2B5EF4-FFF2-40B4-BE49-F238E27FC236}">
+                <a16:creationId xmlns:a16="http://schemas.microsoft.com/office/drawing/2014/main" id="{53AC0B43-0B1A-D39B-EDB0-97154A769DB2}"/>
+              </a:ext>
+            </a:extLst>
+          </p:cNvPr>
+          <p:cNvSpPr>
+            <a:spLocks noGrp="1"/>
+          </p:cNvSpPr>
+          <p:nvPr>
+            <p:ph idx="1"/>
+          </p:nvPr>
+        </p:nvSpPr>
+        <p:spPr/>
+        <p:txBody>
+          <a:bodyPr>
+            <a:normAutofit lnSpcReduction="10000"/>
+          </a:bodyPr>
+          <a:lstStyle/>
+          <a:p>
+            <a:r>
+              <a:rPr lang="en-GB" dirty="0"/>
+              <a:t>AIC tells us the “most parsimonious model” or “best model”</a:t>
+            </a:r>
+          </a:p>
+          <a:p>
+            <a:r>
+              <a:rPr lang="en-GB" dirty="0"/>
+              <a:t>Best is evaluated by finding the version of the model that most closely fits the data, as efficiently as possible</a:t>
+            </a:r>
+          </a:p>
+          <a:p>
+            <a:pPr lvl="1"/>
+            <a:r>
+              <a:rPr lang="en-GB" dirty="0"/>
+              <a:t>Evaluating predictive performance</a:t>
+            </a:r>
+          </a:p>
+          <a:p>
+            <a:pPr lvl="1"/>
+            <a:r>
+              <a:rPr lang="en-GB" dirty="0"/>
+              <a:t>I.e. which is the most accurate model</a:t>
+            </a:r>
+          </a:p>
+          <a:p>
+            <a:r>
+              <a:rPr lang="en-GB" dirty="0"/>
+              <a:t>Meaning AIC is useful for making predictive model more efficient</a:t>
+            </a:r>
+          </a:p>
+          <a:p>
+            <a:pPr lvl="1"/>
+            <a:r>
+              <a:rPr lang="en-GB" dirty="0"/>
+              <a:t>Remember that confounding allows us to make very accurate predictions with no causation</a:t>
+            </a:r>
+          </a:p>
+        </p:txBody>
+      </p:sp>
+      <p:pic>
+        <p:nvPicPr>
+          <p:cNvPr id="5" name="Picture Placeholder 4" descr="A screen shot of a cell phone&#10;&#10;Description automatically generated">
+            <a:extLst>
+              <a:ext uri="{FF2B5EF4-FFF2-40B4-BE49-F238E27FC236}">
+                <a16:creationId xmlns:a16="http://schemas.microsoft.com/office/drawing/2014/main" id="{0CCBD3D3-9640-0891-0EFB-A3929C89B139}"/>
+              </a:ext>
+            </a:extLst>
+          </p:cNvPr>
+          <p:cNvPicPr>
+            <a:picLocks noGrp="1" noChangeAspect="1"/>
+          </p:cNvPicPr>
+          <p:nvPr>
+            <p:ph type="pic" sz="quarter" idx="10"/>
+          </p:nvPr>
+        </p:nvPicPr>
+        <p:blipFill>
+          <a:blip r:embed="rId3">
+            <a:extLst>
+              <a:ext uri="{28A0092B-C50C-407E-A947-70E740481C1C}">
+                <a14:useLocalDpi xmlns:a14="http://schemas.microsoft.com/office/drawing/2010/main" val="0"/>
+              </a:ext>
+            </a:extLst>
+          </a:blip>
+          <a:srcRect t="691" b="691"/>
+          <a:stretch>
+            <a:fillRect/>
+          </a:stretch>
+        </p:blipFill>
+        <p:spPr>
+          <a:xfrm>
+            <a:off x="6359525" y="0"/>
+            <a:ext cx="5832475" cy="6858000"/>
+          </a:xfrm>
+          <a:prstGeom prst="rect">
+            <a:avLst/>
+          </a:prstGeom>
+        </p:spPr>
+      </p:pic>
+    </p:spTree>
+    <p:extLst>
+      <p:ext uri="{BB962C8B-B14F-4D97-AF65-F5344CB8AC3E}">
+        <p14:creationId xmlns:p14="http://schemas.microsoft.com/office/powerpoint/2010/main" val="697298608"/>
+      </p:ext>
+    </p:extLst>
+  </p:cSld>
+  <p:clrMapOvr>
+    <a:masterClrMapping/>
+  </p:clrMapOvr>
+  <p:timing>
+    <p:tnLst>
+      <p:par>
+        <p:cTn id="1" dur="indefinite" restart="never" nodeType="tmRoot">
+          <p:childTnLst>
+            <p:seq concurrent="1" nextAc="seek">
+              <p:cTn id="2" dur="indefinite" nodeType="mainSeq">
+                <p:childTnLst>
+                  <p:par>
+                    <p:cTn id="3" fill="hold">
+                      <p:stCondLst>
+                        <p:cond delay="indefinite"/>
+                      </p:stCondLst>
+                      <p:childTnLst>
+                        <p:par>
+                          <p:cTn id="4" fill="hold">
+                            <p:stCondLst>
+                              <p:cond delay="0"/>
+                            </p:stCondLst>
+                            <p:childTnLst>
+                              <p:par>
+                                <p:cTn id="5" presetID="10" presetClass="entr" presetSubtype="0" fill="hold" grpId="0" nodeType="clickEffect">
+                                  <p:stCondLst>
+                                    <p:cond delay="0"/>
+                                  </p:stCondLst>
+                                  <p:childTnLst>
+                                    <p:set>
+                                      <p:cBhvr>
+                                        <p:cTn id="6" dur="1" fill="hold">
+                                          <p:stCondLst>
+                                            <p:cond delay="0"/>
+                                          </p:stCondLst>
+                                        </p:cTn>
+                                        <p:tgtEl>
+                                          <p:spTgt spid="3">
+                                            <p:txEl>
+                                              <p:pRg st="0" end="0"/>
+                                            </p:txEl>
+                                          </p:spTgt>
+                                        </p:tgtEl>
+                                        <p:attrNameLst>
+                                          <p:attrName>style.visibility</p:attrName>
+                                        </p:attrNameLst>
+                                      </p:cBhvr>
+                                      <p:to>
+                                        <p:strVal val="visible"/>
+                                      </p:to>
+                                    </p:set>
+                                    <p:animEffect transition="in" filter="fade">
+                                      <p:cBhvr>
+                                        <p:cTn id="7" dur="500"/>
+                                        <p:tgtEl>
+                                          <p:spTgt spid="3">
+                                            <p:txEl>
+                                              <p:pRg st="0" end="0"/>
+                                            </p:txEl>
+                                          </p:spTgt>
+                                        </p:tgtEl>
+                                      </p:cBhvr>
+                                    </p:animEffect>
+                                  </p:childTnLst>
+                                </p:cTn>
+                              </p:par>
+                            </p:childTnLst>
+                          </p:cTn>
+                        </p:par>
+                      </p:childTnLst>
+                    </p:cTn>
+                  </p:par>
+                  <p:par>
+                    <p:cTn id="8" fill="hold">
+                      <p:stCondLst>
+                        <p:cond delay="indefinite"/>
+                      </p:stCondLst>
+                      <p:childTnLst>
+                        <p:par>
+                          <p:cTn id="9" fill="hold">
+                            <p:stCondLst>
+                              <p:cond delay="0"/>
+                            </p:stCondLst>
+                            <p:childTnLst>
+                              <p:par>
+                                <p:cTn id="10" presetID="10" presetClass="entr" presetSubtype="0" fill="hold" grpId="0" nodeType="clickEffect">
+                                  <p:stCondLst>
+                                    <p:cond delay="0"/>
+                                  </p:stCondLst>
+                                  <p:childTnLst>
+                                    <p:set>
+                                      <p:cBhvr>
+                                        <p:cTn id="11" dur="1" fill="hold">
+                                          <p:stCondLst>
+                                            <p:cond delay="0"/>
+                                          </p:stCondLst>
+                                        </p:cTn>
+                                        <p:tgtEl>
+                                          <p:spTgt spid="3">
+                                            <p:txEl>
+                                              <p:pRg st="1" end="1"/>
+                                            </p:txEl>
+                                          </p:spTgt>
+                                        </p:tgtEl>
+                                        <p:attrNameLst>
+                                          <p:attrName>style.visibility</p:attrName>
+                                        </p:attrNameLst>
+                                      </p:cBhvr>
+                                      <p:to>
+                                        <p:strVal val="visible"/>
+                                      </p:to>
+                                    </p:set>
+                                    <p:animEffect transition="in" filter="fade">
+                                      <p:cBhvr>
+                                        <p:cTn id="12" dur="500"/>
+                                        <p:tgtEl>
+                                          <p:spTgt spid="3">
+                                            <p:txEl>
+                                              <p:pRg st="1" end="1"/>
+                                            </p:txEl>
+                                          </p:spTgt>
+                                        </p:tgtEl>
+                                      </p:cBhvr>
+                                    </p:animEffect>
+                                  </p:childTnLst>
+                                </p:cTn>
+                              </p:par>
+                              <p:par>
+                                <p:cTn id="13" presetID="10" presetClass="entr" presetSubtype="0" fill="hold" grpId="0" nodeType="withEffect">
+                                  <p:stCondLst>
+                                    <p:cond delay="0"/>
+                                  </p:stCondLst>
+                                  <p:childTnLst>
+                                    <p:set>
+                                      <p:cBhvr>
+                                        <p:cTn id="14" dur="1" fill="hold">
+                                          <p:stCondLst>
+                                            <p:cond delay="0"/>
+                                          </p:stCondLst>
+                                        </p:cTn>
+                                        <p:tgtEl>
+                                          <p:spTgt spid="3">
+                                            <p:txEl>
+                                              <p:pRg st="2" end="2"/>
+                                            </p:txEl>
+                                          </p:spTgt>
+                                        </p:tgtEl>
+                                        <p:attrNameLst>
+                                          <p:attrName>style.visibility</p:attrName>
+                                        </p:attrNameLst>
+                                      </p:cBhvr>
+                                      <p:to>
+                                        <p:strVal val="visible"/>
+                                      </p:to>
+                                    </p:set>
+                                    <p:animEffect transition="in" filter="fade">
+                                      <p:cBhvr>
+                                        <p:cTn id="15" dur="500"/>
+                                        <p:tgtEl>
+                                          <p:spTgt spid="3">
+                                            <p:txEl>
+                                              <p:pRg st="2" end="2"/>
+                                            </p:txEl>
+                                          </p:spTgt>
+                                        </p:tgtEl>
+                                      </p:cBhvr>
+                                    </p:animEffect>
+                                  </p:childTnLst>
+                                </p:cTn>
+                              </p:par>
+                              <p:par>
+                                <p:cTn id="16" presetID="10" presetClass="entr" presetSubtype="0" fill="hold" grpId="0" nodeType="withEffect">
+                                  <p:stCondLst>
+                                    <p:cond delay="0"/>
+                                  </p:stCondLst>
+                                  <p:childTnLst>
+                                    <p:set>
+                                      <p:cBhvr>
+                                        <p:cTn id="17" dur="1" fill="hold">
+                                          <p:stCondLst>
+                                            <p:cond delay="0"/>
+                                          </p:stCondLst>
+                                        </p:cTn>
+                                        <p:tgtEl>
+                                          <p:spTgt spid="3">
+                                            <p:txEl>
+                                              <p:pRg st="3" end="3"/>
+                                            </p:txEl>
+                                          </p:spTgt>
+                                        </p:tgtEl>
+                                        <p:attrNameLst>
+                                          <p:attrName>style.visibility</p:attrName>
+                                        </p:attrNameLst>
+                                      </p:cBhvr>
+                                      <p:to>
+                                        <p:strVal val="visible"/>
+                                      </p:to>
+                                    </p:set>
+                                    <p:animEffect transition="in" filter="fade">
+                                      <p:cBhvr>
+                                        <p:cTn id="18" dur="500"/>
+                                        <p:tgtEl>
+                                          <p:spTgt spid="3">
+                                            <p:txEl>
+                                              <p:pRg st="3" end="3"/>
+                                            </p:txEl>
+                                          </p:spTgt>
+                                        </p:tgtEl>
+                                      </p:cBhvr>
+                                    </p:animEffect>
+                                  </p:childTnLst>
+                                </p:cTn>
+                              </p:par>
+                            </p:childTnLst>
+                          </p:cTn>
+                        </p:par>
+                      </p:childTnLst>
+                    </p:cTn>
+                  </p:par>
+                  <p:par>
+                    <p:cTn id="19" fill="hold">
+                      <p:stCondLst>
+                        <p:cond delay="indefinite"/>
+                      </p:stCondLst>
+                      <p:childTnLst>
+                        <p:par>
+                          <p:cTn id="20" fill="hold">
+                            <p:stCondLst>
+                              <p:cond delay="0"/>
+                            </p:stCondLst>
+                            <p:childTnLst>
+                              <p:par>
+                                <p:cTn id="21" presetID="10" presetClass="entr" presetSubtype="0" fill="hold" grpId="0" nodeType="clickEffect">
+                                  <p:stCondLst>
+                                    <p:cond delay="0"/>
+                                  </p:stCondLst>
+                                  <p:childTnLst>
+                                    <p:set>
+                                      <p:cBhvr>
+                                        <p:cTn id="22" dur="1" fill="hold">
+                                          <p:stCondLst>
+                                            <p:cond delay="0"/>
+                                          </p:stCondLst>
+                                        </p:cTn>
+                                        <p:tgtEl>
+                                          <p:spTgt spid="3">
+                                            <p:txEl>
+                                              <p:pRg st="4" end="4"/>
+                                            </p:txEl>
+                                          </p:spTgt>
+                                        </p:tgtEl>
+                                        <p:attrNameLst>
+                                          <p:attrName>style.visibility</p:attrName>
+                                        </p:attrNameLst>
+                                      </p:cBhvr>
+                                      <p:to>
+                                        <p:strVal val="visible"/>
+                                      </p:to>
+                                    </p:set>
+                                    <p:animEffect transition="in" filter="fade">
+                                      <p:cBhvr>
+                                        <p:cTn id="23" dur="500"/>
+                                        <p:tgtEl>
+                                          <p:spTgt spid="3">
+                                            <p:txEl>
+                                              <p:pRg st="4" end="4"/>
+                                            </p:txEl>
+                                          </p:spTgt>
+                                        </p:tgtEl>
+                                      </p:cBhvr>
+                                    </p:animEffect>
+                                  </p:childTnLst>
+                                </p:cTn>
+                              </p:par>
+                              <p:par>
+                                <p:cTn id="24" presetID="10" presetClass="entr" presetSubtype="0" fill="hold" grpId="0" nodeType="withEffect">
+                                  <p:stCondLst>
+                                    <p:cond delay="0"/>
+                                  </p:stCondLst>
+                                  <p:childTnLst>
+                                    <p:set>
+                                      <p:cBhvr>
+                                        <p:cTn id="25" dur="1" fill="hold">
+                                          <p:stCondLst>
+                                            <p:cond delay="0"/>
+                                          </p:stCondLst>
+                                        </p:cTn>
+                                        <p:tgtEl>
+                                          <p:spTgt spid="3">
+                                            <p:txEl>
+                                              <p:pRg st="5" end="5"/>
+                                            </p:txEl>
+                                          </p:spTgt>
+                                        </p:tgtEl>
+                                        <p:attrNameLst>
+                                          <p:attrName>style.visibility</p:attrName>
+                                        </p:attrNameLst>
+                                      </p:cBhvr>
+                                      <p:to>
+                                        <p:strVal val="visible"/>
+                                      </p:to>
+                                    </p:set>
+                                    <p:animEffect transition="in" filter="fade">
+                                      <p:cBhvr>
+                                        <p:cTn id="26" dur="500"/>
+                                        <p:tgtEl>
+                                          <p:spTgt spid="3">
+                                            <p:txEl>
+                                              <p:pRg st="5" end="5"/>
+                                            </p:txEl>
+                                          </p:spTgt>
+                                        </p:tgtEl>
+                                      </p:cBhvr>
+                                    </p:animEffect>
+                                  </p:childTnLst>
+                                </p:cTn>
+                              </p:par>
+                            </p:childTnLst>
+                          </p:cTn>
+                        </p:par>
+                      </p:childTnLst>
+                    </p:cTn>
+                  </p:par>
+                </p:childTnLst>
+              </p:cTn>
+              <p:prevCondLst>
+                <p:cond evt="onPrev" delay="0">
+                  <p:tgtEl>
+                    <p:sldTgt/>
+                  </p:tgtEl>
+                </p:cond>
+              </p:prevCondLst>
+              <p:nextCondLst>
+                <p:cond evt="onNext" delay="0">
+                  <p:tgtEl>
+                    <p:sldTgt/>
+                  </p:tgtEl>
+                </p:cond>
+              </p:nextCondLst>
+            </p:seq>
+          </p:childTnLst>
+        </p:cTn>
+      </p:par>
+    </p:tnLst>
+    <p:bldLst>
+      <p:bldP spid="3" grpId="0" build="p"/>
+    </p:bldLst>
+  </p:timing>
+</p:sld>
+</file>
+
+<file path=ppt/slides/slide12.xml><?xml version="1.0" encoding="utf-8"?>
+<p:sld xmlns:a="http://schemas.openxmlformats.org/drawingml/2006/main" xmlns:r="http://schemas.openxmlformats.org/officeDocument/2006/relationships" xmlns:p="http://schemas.openxmlformats.org/presentationml/2006/main">
+  <p:cSld>
+    <p:spTree>
+      <p:nvGrpSpPr>
+        <p:cNvPr id="1" name=""/>
+        <p:cNvGrpSpPr/>
+        <p:nvPr/>
+      </p:nvGrpSpPr>
+      <p:grpSpPr>
+        <a:xfrm>
+          <a:off x="0" y="0"/>
+          <a:ext cx="0" cy="0"/>
+          <a:chOff x="0" y="0"/>
+          <a:chExt cx="0" cy="0"/>
+        </a:xfrm>
+      </p:grpSpPr>
+      <p:sp>
+        <p:nvSpPr>
+          <p:cNvPr id="2" name="Title 1">
+            <a:extLst>
+              <a:ext uri="{FF2B5EF4-FFF2-40B4-BE49-F238E27FC236}">
                 <a16:creationId xmlns:a16="http://schemas.microsoft.com/office/drawing/2014/main" id="{4D5EDB75-127C-46A7-99D3-1101A69BCB53}"/>
               </a:ext>
             </a:extLst>
@@ -4794,8 +5409,8 @@
           </p:sp>
         </mc:Fallback>
       </mc:AlternateContent>
-      <mc:AlternateContent xmlns:mc="http://schemas.openxmlformats.org/markup-compatibility/2006">
-        <mc:Choice xmlns:a14="http://schemas.microsoft.com/office/drawing/2010/main" Requires="a14">
+      <mc:AlternateContent xmlns:mc="http://schemas.openxmlformats.org/markup-compatibility/2006" xmlns:a14="http://schemas.microsoft.com/office/drawing/2010/main">
+        <mc:Choice Requires="a14">
           <p:graphicFrame>
             <p:nvGraphicFramePr>
               <p:cNvPr id="6" name="Table 6">
@@ -5672,7 +6287,7 @@
             </a:graphic>
           </p:graphicFrame>
         </mc:Choice>
-        <mc:Fallback>
+        <mc:Fallback xmlns="">
           <p:graphicFrame>
             <p:nvGraphicFramePr>
               <p:cNvPr id="6" name="Table 6">
@@ -6208,10 +6823,22 @@
   <p:clrMapOvr>
     <a:masterClrMapping/>
   </p:clrMapOvr>
+  <mc:AlternateContent xmlns:mc="http://schemas.openxmlformats.org/markup-compatibility/2006" xmlns:p14="http://schemas.microsoft.com/office/powerpoint/2010/main">
+    <mc:Choice Requires="p14">
+      <p:transition spd="med" p14:dur="700">
+        <p:fade/>
+      </p:transition>
+    </mc:Choice>
+    <mc:Fallback xmlns="">
+      <p:transition spd="med">
+        <p:fade/>
+      </p:transition>
+    </mc:Fallback>
+  </mc:AlternateContent>
 </p:sld>
 </file>
 
-<file path=ppt/slides/slide12.xml><?xml version="1.0" encoding="utf-8"?>
+<file path=ppt/slides/slide13.xml><?xml version="1.0" encoding="utf-8"?>
 <p:sld xmlns:a="http://schemas.openxmlformats.org/drawingml/2006/main" xmlns:r="http://schemas.openxmlformats.org/officeDocument/2006/relationships" xmlns:p="http://schemas.openxmlformats.org/presentationml/2006/main">
   <p:cSld>
     <p:spTree>
@@ -6293,20 +6920,54 @@
           <a:p>
             <a:r>
               <a:rPr lang="en-GB" dirty="0"/>
-              <a:t>We can use the MLE of each model to find the most parsimonious model that was tested.</a:t>
+              <a:t>We can use the MLE (the “rating”) of each model to find the most parsimonious model that was tested.</a:t>
+            </a:r>
+          </a:p>
+          <a:p>
+            <a:r>
+              <a:rPr lang="en-GB" dirty="0"/>
+              <a:t>AIC attempts to optimise two features</a:t>
             </a:r>
           </a:p>
           <a:p>
             <a:pPr lvl="1"/>
             <a:r>
               <a:rPr lang="en-GB" dirty="0"/>
-              <a:t>If two of your lowest models have a ∆AIC ≤ 2 (e.g., 0 and 1.2), you cannot use AIC to distinguish between them.</a:t>
-            </a:r>
-          </a:p>
-          <a:p>
+              <a:t>How well the model captures the data</a:t>
+            </a:r>
+          </a:p>
+          <a:p>
+            <a:pPr lvl="1"/>
             <a:r>
               <a:rPr lang="en-GB" dirty="0"/>
-              <a:t>AIC is a method to distinguish between models, but it doesn’t mean you can turn your brain off! Trust your biological training!</a:t>
+              <a:t>The number of parameters required to get that fit</a:t>
+            </a:r>
+          </a:p>
+          <a:p>
+            <a:r>
+              <a:rPr lang="en-GB" dirty="0"/>
+              <a:t>The end result is an efficient </a:t>
+            </a:r>
+            <a:r>
+              <a:rPr lang="en-GB" i="1" dirty="0"/>
+              <a:t>predictive</a:t>
+            </a:r>
+            <a:r>
+              <a:rPr lang="en-GB" dirty="0"/>
+              <a:t> model</a:t>
+            </a:r>
+          </a:p>
+          <a:p>
+            <a:r>
+              <a:rPr lang="en-GB" dirty="0"/>
+              <a:t>AIC does not help us understand causation</a:t>
+            </a:r>
+          </a:p>
+          <a:p>
+            <a:pPr lvl="1"/>
+            <a:r>
+              <a:rPr lang="en-GB" dirty="0"/>
+              <a:t>Because confounding often allows for highly accurate predictions</a:t>
             </a:r>
           </a:p>
         </p:txBody>
@@ -6321,6 +6982,18 @@
   <p:clrMapOvr>
     <a:masterClrMapping/>
   </p:clrMapOvr>
+  <mc:AlternateContent xmlns:mc="http://schemas.openxmlformats.org/markup-compatibility/2006" xmlns:p14="http://schemas.microsoft.com/office/powerpoint/2010/main">
+    <mc:Choice Requires="p14">
+      <p:transition spd="med" p14:dur="700">
+        <p:fade/>
+      </p:transition>
+    </mc:Choice>
+    <mc:Fallback xmlns="">
+      <p:transition spd="med">
+        <p:fade/>
+      </p:transition>
+    </mc:Fallback>
+  </mc:AlternateContent>
   <p:timing>
     <p:tnLst>
       <p:par>
@@ -6372,15 +7045,33 @@
                                   </p:childTnLst>
                                 </p:cTn>
                               </p:par>
+                            </p:childTnLst>
+                          </p:cTn>
+                        </p:par>
+                      </p:childTnLst>
+                    </p:cTn>
+                  </p:par>
+                  <p:par>
+                    <p:cTn id="7" fill="hold">
+                      <p:stCondLst>
+                        <p:cond delay="indefinite"/>
+                      </p:stCondLst>
+                      <p:childTnLst>
+                        <p:par>
+                          <p:cTn id="8" fill="hold">
+                            <p:stCondLst>
+                              <p:cond delay="0"/>
+                            </p:stCondLst>
+                            <p:childTnLst>
                               <p:par>
-                                <p:cTn id="7" presetID="1" presetClass="entr" presetSubtype="0" fill="hold" grpId="0" nodeType="withEffect">
+                                <p:cTn id="9" presetID="1" presetClass="entr" presetSubtype="0" fill="hold" grpId="0" nodeType="clickEffect">
                                   <p:stCondLst>
                                     <p:cond delay="0"/>
                                   </p:stCondLst>
                                   <p:childTnLst>
                                     <p:set>
                                       <p:cBhvr>
-                                        <p:cTn id="8" dur="1" fill="hold">
+                                        <p:cTn id="10" dur="1" fill="hold">
                                           <p:stCondLst>
                                             <p:cond delay="0"/>
                                           </p:stCondLst>
@@ -6403,26 +7094,8 @@
                                   </p:childTnLst>
                                 </p:cTn>
                               </p:par>
-                            </p:childTnLst>
-                          </p:cTn>
-                        </p:par>
-                      </p:childTnLst>
-                    </p:cTn>
-                  </p:par>
-                  <p:par>
-                    <p:cTn id="9" fill="hold">
-                      <p:stCondLst>
-                        <p:cond delay="indefinite"/>
-                      </p:stCondLst>
-                      <p:childTnLst>
-                        <p:par>
-                          <p:cTn id="10" fill="hold">
-                            <p:stCondLst>
-                              <p:cond delay="0"/>
-                            </p:stCondLst>
-                            <p:childTnLst>
                               <p:par>
-                                <p:cTn id="11" presetID="1" presetClass="entr" presetSubtype="0" fill="hold" grpId="0" nodeType="clickEffect">
+                                <p:cTn id="11" presetID="1" presetClass="entr" presetSubtype="0" fill="hold" grpId="0" nodeType="withEffect">
                                   <p:stCondLst>
                                     <p:cond delay="0"/>
                                   </p:stCondLst>
@@ -6438,6 +7111,166 @@
                                           <p:spTgt spid="3">
                                             <p:txEl>
                                               <p:pRg st="2" end="2"/>
+                                            </p:txEl>
+                                          </p:spTgt>
+                                        </p:tgtEl>
+                                        <p:attrNameLst>
+                                          <p:attrName>style.visibility</p:attrName>
+                                        </p:attrNameLst>
+                                      </p:cBhvr>
+                                      <p:to>
+                                        <p:strVal val="visible"/>
+                                      </p:to>
+                                    </p:set>
+                                  </p:childTnLst>
+                                </p:cTn>
+                              </p:par>
+                              <p:par>
+                                <p:cTn id="13" presetID="1" presetClass="entr" presetSubtype="0" fill="hold" grpId="0" nodeType="withEffect">
+                                  <p:stCondLst>
+                                    <p:cond delay="0"/>
+                                  </p:stCondLst>
+                                  <p:childTnLst>
+                                    <p:set>
+                                      <p:cBhvr>
+                                        <p:cTn id="14" dur="1" fill="hold">
+                                          <p:stCondLst>
+                                            <p:cond delay="0"/>
+                                          </p:stCondLst>
+                                        </p:cTn>
+                                        <p:tgtEl>
+                                          <p:spTgt spid="3">
+                                            <p:txEl>
+                                              <p:pRg st="3" end="3"/>
+                                            </p:txEl>
+                                          </p:spTgt>
+                                        </p:tgtEl>
+                                        <p:attrNameLst>
+                                          <p:attrName>style.visibility</p:attrName>
+                                        </p:attrNameLst>
+                                      </p:cBhvr>
+                                      <p:to>
+                                        <p:strVal val="visible"/>
+                                      </p:to>
+                                    </p:set>
+                                  </p:childTnLst>
+                                </p:cTn>
+                              </p:par>
+                            </p:childTnLst>
+                          </p:cTn>
+                        </p:par>
+                      </p:childTnLst>
+                    </p:cTn>
+                  </p:par>
+                  <p:par>
+                    <p:cTn id="15" fill="hold">
+                      <p:stCondLst>
+                        <p:cond delay="indefinite"/>
+                      </p:stCondLst>
+                      <p:childTnLst>
+                        <p:par>
+                          <p:cTn id="16" fill="hold">
+                            <p:stCondLst>
+                              <p:cond delay="0"/>
+                            </p:stCondLst>
+                            <p:childTnLst>
+                              <p:par>
+                                <p:cTn id="17" presetID="1" presetClass="entr" presetSubtype="0" fill="hold" grpId="0" nodeType="clickEffect">
+                                  <p:stCondLst>
+                                    <p:cond delay="0"/>
+                                  </p:stCondLst>
+                                  <p:childTnLst>
+                                    <p:set>
+                                      <p:cBhvr>
+                                        <p:cTn id="18" dur="1" fill="hold">
+                                          <p:stCondLst>
+                                            <p:cond delay="0"/>
+                                          </p:stCondLst>
+                                        </p:cTn>
+                                        <p:tgtEl>
+                                          <p:spTgt spid="3">
+                                            <p:txEl>
+                                              <p:pRg st="4" end="4"/>
+                                            </p:txEl>
+                                          </p:spTgt>
+                                        </p:tgtEl>
+                                        <p:attrNameLst>
+                                          <p:attrName>style.visibility</p:attrName>
+                                        </p:attrNameLst>
+                                      </p:cBhvr>
+                                      <p:to>
+                                        <p:strVal val="visible"/>
+                                      </p:to>
+                                    </p:set>
+                                  </p:childTnLst>
+                                </p:cTn>
+                              </p:par>
+                            </p:childTnLst>
+                          </p:cTn>
+                        </p:par>
+                      </p:childTnLst>
+                    </p:cTn>
+                  </p:par>
+                  <p:par>
+                    <p:cTn id="19" fill="hold">
+                      <p:stCondLst>
+                        <p:cond delay="indefinite"/>
+                      </p:stCondLst>
+                      <p:childTnLst>
+                        <p:par>
+                          <p:cTn id="20" fill="hold">
+                            <p:stCondLst>
+                              <p:cond delay="0"/>
+                            </p:stCondLst>
+                            <p:childTnLst>
+                              <p:par>
+                                <p:cTn id="21" presetID="1" presetClass="entr" presetSubtype="0" fill="hold" grpId="0" nodeType="clickEffect">
+                                  <p:stCondLst>
+                                    <p:cond delay="0"/>
+                                  </p:stCondLst>
+                                  <p:childTnLst>
+                                    <p:set>
+                                      <p:cBhvr>
+                                        <p:cTn id="22" dur="1" fill="hold">
+                                          <p:stCondLst>
+                                            <p:cond delay="0"/>
+                                          </p:stCondLst>
+                                        </p:cTn>
+                                        <p:tgtEl>
+                                          <p:spTgt spid="3">
+                                            <p:txEl>
+                                              <p:pRg st="5" end="5"/>
+                                            </p:txEl>
+                                          </p:spTgt>
+                                        </p:tgtEl>
+                                        <p:attrNameLst>
+                                          <p:attrName>style.visibility</p:attrName>
+                                        </p:attrNameLst>
+                                      </p:cBhvr>
+                                      <p:to>
+                                        <p:strVal val="visible"/>
+                                      </p:to>
+                                    </p:set>
+                                  </p:childTnLst>
+                                </p:cTn>
+                              </p:par>
+                              <p:par>
+                                <p:cTn id="23" presetID="1" presetClass="entr" presetSubtype="0" fill="hold" grpId="0" nodeType="withEffect">
+                                  <p:stCondLst>
+                                    <p:cond delay="0"/>
+                                  </p:stCondLst>
+                                  <p:childTnLst>
+                                    <p:set>
+                                      <p:cBhvr>
+                                        <p:cTn id="24" dur="1" fill="hold">
+                                          <p:stCondLst>
+                                            <p:cond delay="0"/>
+                                          </p:stCondLst>
+                                        </p:cTn>
+                                        <p:tgtEl>
+                                          <p:spTgt spid="3">
+                                            <p:txEl>
+                                              <p:pRg st="6" end="6"/>
                                             </p:txEl>
                                           </p:spTgt>
                                         </p:tgtEl>
@@ -6480,7 +7313,7 @@
       </p:par>
     </p:tnLst>
     <p:bldLst>
-      <p:bldP spid="3" grpId="0" build="p"/>
+      <p:bldP spid="3" grpId="0" uiExpand="1" build="p"/>
     </p:bldLst>
   </p:timing>
 </p:sld>
@@ -6566,19 +7399,31 @@
           <a:p>
             <a:pPr lvl="1"/>
             <a:r>
-              <a:rPr lang="en-GB" dirty="0" err="1"/>
+              <a:rPr lang="en-GB" dirty="0" err="1">
+                <a:latin typeface="Courier New" panose="02070309020205020404" pitchFamily="49" charset="0"/>
+                <a:cs typeface="Courier New" panose="02070309020205020404" pitchFamily="49" charset="0"/>
+              </a:rPr>
               <a:t>lm</a:t>
             </a:r>
             <a:r>
-              <a:rPr lang="en-GB" dirty="0"/>
+              <a:rPr lang="en-GB" dirty="0">
+                <a:latin typeface="Courier New" panose="02070309020205020404" pitchFamily="49" charset="0"/>
+                <a:cs typeface="Courier New" panose="02070309020205020404" pitchFamily="49" charset="0"/>
+              </a:rPr>
               <a:t>(height ~ </a:t>
             </a:r>
             <a:r>
-              <a:rPr lang="en-GB" dirty="0" err="1"/>
+              <a:rPr lang="en-GB" dirty="0" err="1">
+                <a:latin typeface="Courier New" panose="02070309020205020404" pitchFamily="49" charset="0"/>
+                <a:cs typeface="Courier New" panose="02070309020205020404" pitchFamily="49" charset="0"/>
+              </a:rPr>
               <a:t>age_factor</a:t>
             </a:r>
             <a:r>
-              <a:rPr lang="en-GB" dirty="0"/>
+              <a:rPr lang="en-GB" dirty="0">
+                <a:latin typeface="Courier New" panose="02070309020205020404" pitchFamily="49" charset="0"/>
+                <a:cs typeface="Courier New" panose="02070309020205020404" pitchFamily="49" charset="0"/>
+              </a:rPr>
               <a:t>)</a:t>
             </a:r>
           </a:p>
@@ -6598,11 +7443,17 @@
           <a:p>
             <a:pPr lvl="1"/>
             <a:r>
-              <a:rPr lang="en-GB" dirty="0" err="1"/>
+              <a:rPr lang="en-GB" dirty="0" err="1">
+                <a:latin typeface="Courier New" panose="02070309020205020404" pitchFamily="49" charset="0"/>
+                <a:cs typeface="Courier New" panose="02070309020205020404" pitchFamily="49" charset="0"/>
+              </a:rPr>
               <a:t>lm</a:t>
             </a:r>
             <a:r>
-              <a:rPr lang="en-GB" dirty="0"/>
+              <a:rPr lang="en-GB" dirty="0">
+                <a:latin typeface="Courier New" panose="02070309020205020404" pitchFamily="49" charset="0"/>
+                <a:cs typeface="Courier New" panose="02070309020205020404" pitchFamily="49" charset="0"/>
+              </a:rPr>
               <a:t>(height ~ 1)</a:t>
             </a:r>
           </a:p>
@@ -6622,11 +7473,17 @@
           <a:p>
             <a:pPr lvl="1"/>
             <a:r>
-              <a:rPr lang="en-GB" dirty="0" err="1"/>
+              <a:rPr lang="en-GB" dirty="0" err="1">
+                <a:latin typeface="Courier New" panose="02070309020205020404" pitchFamily="49" charset="0"/>
+                <a:cs typeface="Courier New" panose="02070309020205020404" pitchFamily="49" charset="0"/>
+              </a:rPr>
               <a:t>lm</a:t>
             </a:r>
             <a:r>
-              <a:rPr lang="en-GB" dirty="0"/>
+              <a:rPr lang="en-GB" dirty="0">
+                <a:latin typeface="Courier New" panose="02070309020205020404" pitchFamily="49" charset="0"/>
+                <a:cs typeface="Courier New" panose="02070309020205020404" pitchFamily="49" charset="0"/>
+              </a:rPr>
               <a:t>(height ~ age)</a:t>
             </a:r>
           </a:p>
@@ -6739,7 +7596,7 @@
         </p:blipFill>
         <p:spPr>
           <a:xfrm>
-            <a:off x="6440129" y="0"/>
+            <a:off x="6440128" y="0"/>
             <a:ext cx="5751871" cy="6858000"/>
           </a:xfrm>
           <a:prstGeom prst="rect">
@@ -6775,7 +7632,7 @@
         </p:blipFill>
         <p:spPr>
           <a:xfrm>
-            <a:off x="6440128" y="0"/>
+            <a:off x="6440129" y="0"/>
             <a:ext cx="5751871" cy="6858000"/>
           </a:xfrm>
           <a:prstGeom prst="rect">
@@ -6793,6 +7650,18 @@
   <p:clrMapOvr>
     <a:masterClrMapping/>
   </p:clrMapOvr>
+  <mc:AlternateContent xmlns:mc="http://schemas.openxmlformats.org/markup-compatibility/2006" xmlns:p14="http://schemas.microsoft.com/office/powerpoint/2010/main">
+    <mc:Choice Requires="p14">
+      <p:transition spd="med" p14:dur="700">
+        <p:fade/>
+      </p:transition>
+    </mc:Choice>
+    <mc:Fallback xmlns="">
+      <p:transition spd="med">
+        <p:fade/>
+      </p:transition>
+    </mc:Fallback>
+  </mc:AlternateContent>
   <p:timing>
     <p:tnLst>
       <p:par>
@@ -7535,94 +8404,357 @@
           </a:p>
         </p:txBody>
       </p:sp>
-      <p:sp>
-        <p:nvSpPr>
-          <p:cNvPr id="3" name="Content Placeholder 2">
-            <a:extLst>
-              <a:ext uri="{FF2B5EF4-FFF2-40B4-BE49-F238E27FC236}">
-                <a16:creationId xmlns:a16="http://schemas.microsoft.com/office/drawing/2014/main" id="{3FF35B1B-5C22-837C-A327-D38BFC9F5157}"/>
-              </a:ext>
-            </a:extLst>
-          </p:cNvPr>
-          <p:cNvSpPr>
-            <a:spLocks noGrp="1"/>
-          </p:cNvSpPr>
-          <p:nvPr>
-            <p:ph idx="1"/>
-          </p:nvPr>
-        </p:nvSpPr>
-        <p:spPr/>
-        <p:txBody>
-          <a:bodyPr>
-            <a:normAutofit/>
-          </a:bodyPr>
-          <a:lstStyle/>
-          <a:p>
-            <a:r>
-              <a:rPr lang="en-US" dirty="0"/>
-              <a:t>Overfit:</a:t>
-            </a:r>
-          </a:p>
-          <a:p>
-            <a:pPr lvl="1"/>
-            <a:r>
-              <a:rPr lang="en-US" dirty="0"/>
-              <a:t>Explains data almost “perfectly”</a:t>
-            </a:r>
-          </a:p>
-          <a:p>
-            <a:pPr lvl="2"/>
-            <a:r>
-              <a:rPr lang="en-US" dirty="0"/>
-              <a:t>I.e. predictions are exactly the same as the data</a:t>
-            </a:r>
-          </a:p>
-          <a:p>
-            <a:pPr lvl="1"/>
-            <a:r>
-              <a:rPr lang="en-US" dirty="0"/>
-              <a:t>But “costs” lots of parameters</a:t>
-            </a:r>
-          </a:p>
-          <a:p>
-            <a:r>
-              <a:rPr lang="en-GB" sz="2400" dirty="0"/>
-              <a:t>Underfit:</a:t>
-            </a:r>
-          </a:p>
-          <a:p>
-            <a:pPr marL="742950" lvl="1" indent="-285750"/>
-            <a:r>
-              <a:rPr lang="en-GB" sz="2000" dirty="0"/>
-              <a:t>Explains poorly</a:t>
-            </a:r>
-          </a:p>
-          <a:p>
-            <a:pPr marL="1200150" lvl="2" indent="-285750"/>
-            <a:r>
-              <a:rPr lang="en-GB" dirty="0"/>
-              <a:t>I.e. prediction (line) doesn’t really match the observations</a:t>
-            </a:r>
-          </a:p>
-          <a:p>
-            <a:pPr marL="742950" lvl="1" indent="-285750"/>
-            <a:r>
-              <a:rPr lang="en-GB" sz="2000" dirty="0"/>
-              <a:t>But is very “cheap”</a:t>
-            </a:r>
-          </a:p>
-          <a:p>
-            <a:pPr marL="1200150" lvl="2" indent="-285750"/>
-            <a:r>
-              <a:rPr lang="en-GB" dirty="0"/>
-              <a:t>E.g. here we’ve used 2 parameters with only 5 observations</a:t>
-            </a:r>
-          </a:p>
-          <a:p>
-            <a:endParaRPr lang="en-GB" dirty="0"/>
-          </a:p>
-        </p:txBody>
-      </p:sp>
+      <mc:AlternateContent xmlns:mc="http://schemas.openxmlformats.org/markup-compatibility/2006" xmlns:a14="http://schemas.microsoft.com/office/drawing/2010/main">
+        <mc:Choice Requires="a14">
+          <p:sp>
+            <p:nvSpPr>
+              <p:cNvPr id="3" name="Content Placeholder 2">
+                <a:extLst>
+                  <a:ext uri="{FF2B5EF4-FFF2-40B4-BE49-F238E27FC236}">
+                    <a16:creationId xmlns:a16="http://schemas.microsoft.com/office/drawing/2014/main" id="{3FF35B1B-5C22-837C-A327-D38BFC9F5157}"/>
+                  </a:ext>
+                </a:extLst>
+              </p:cNvPr>
+              <p:cNvSpPr>
+                <a:spLocks noGrp="1"/>
+              </p:cNvSpPr>
+              <p:nvPr>
+                <p:ph idx="1"/>
+              </p:nvPr>
+            </p:nvSpPr>
+            <p:spPr/>
+            <p:txBody>
+              <a:bodyPr>
+                <a:normAutofit/>
+              </a:bodyPr>
+              <a:lstStyle/>
+              <a:p>
+                <a:r>
+                  <a:rPr lang="en-US" dirty="0"/>
+                  <a:t>Overfit models:</a:t>
+                </a:r>
+              </a:p>
+              <a:p>
+                <a:pPr lvl="1"/>
+                <a:r>
+                  <a:rPr lang="en-US" dirty="0"/>
+                  <a:t>Explains data almost “perfectly”</a:t>
+                </a:r>
+              </a:p>
+              <a:p>
+                <a:pPr lvl="1"/>
+                <a:r>
+                  <a:rPr lang="en-US" dirty="0"/>
+                  <a:t>But “costs” lots of parameters</a:t>
+                </a:r>
+              </a:p>
+              <a:p>
+                <a:pPr lvl="2"/>
+                <a14:m>
+                  <m:oMath xmlns:m="http://schemas.openxmlformats.org/officeDocument/2006/math">
+                    <m:r>
+                      <a:rPr lang="en-GB" i="1">
+                        <a:latin typeface="Cambria Math" panose="02040503050406030204" pitchFamily="18" charset="0"/>
+                      </a:rPr>
+                      <m:t>𝜇</m:t>
+                    </m:r>
+                    <m:r>
+                      <a:rPr lang="en-GB" i="1">
+                        <a:latin typeface="Cambria Math" panose="02040503050406030204" pitchFamily="18" charset="0"/>
+                      </a:rPr>
+                      <m:t>=</m:t>
+                    </m:r>
+                    <m:sSub>
+                      <m:sSubPr>
+                        <m:ctrlPr>
+                          <a:rPr lang="en-GB" i="1">
+                            <a:latin typeface="Cambria Math" panose="02040503050406030204" pitchFamily="18" charset="0"/>
+                          </a:rPr>
+                        </m:ctrlPr>
+                      </m:sSubPr>
+                      <m:e>
+                        <m:r>
+                          <a:rPr lang="en-GB" i="1">
+                            <a:latin typeface="Cambria Math" panose="02040503050406030204" pitchFamily="18" charset="0"/>
+                          </a:rPr>
+                          <m:t>𝛽</m:t>
+                        </m:r>
+                      </m:e>
+                      <m:sub>
+                        <m:r>
+                          <a:rPr lang="en-GB" i="1">
+                            <a:latin typeface="Cambria Math" panose="02040503050406030204" pitchFamily="18" charset="0"/>
+                          </a:rPr>
+                          <m:t>0</m:t>
+                        </m:r>
+                      </m:sub>
+                    </m:sSub>
+                    <m:r>
+                      <a:rPr lang="en-GB" b="0" i="1" smtClean="0">
+                        <a:latin typeface="Cambria Math" panose="02040503050406030204" pitchFamily="18" charset="0"/>
+                      </a:rPr>
+                      <m:t>+</m:t>
+                    </m:r>
+                    <m:sSub>
+                      <m:sSubPr>
+                        <m:ctrlPr>
+                          <a:rPr lang="en-GB" b="0" i="1" smtClean="0">
+                            <a:latin typeface="Cambria Math" panose="02040503050406030204" pitchFamily="18" charset="0"/>
+                          </a:rPr>
+                        </m:ctrlPr>
+                      </m:sSubPr>
+                      <m:e>
+                        <m:r>
+                          <a:rPr lang="en-GB" b="0" i="1" smtClean="0">
+                            <a:latin typeface="Cambria Math" panose="02040503050406030204" pitchFamily="18" charset="0"/>
+                          </a:rPr>
+                          <m:t>𝛽</m:t>
+                        </m:r>
+                      </m:e>
+                      <m:sub>
+                        <m:r>
+                          <a:rPr lang="en-GB" b="0" i="1" smtClean="0">
+                            <a:latin typeface="Cambria Math" panose="02040503050406030204" pitchFamily="18" charset="0"/>
+                          </a:rPr>
+                          <m:t>1</m:t>
+                        </m:r>
+                      </m:sub>
+                    </m:sSub>
+                    <m:r>
+                      <a:rPr lang="en-GB" b="0" i="1" smtClean="0">
+                        <a:latin typeface="Cambria Math" panose="02040503050406030204" pitchFamily="18" charset="0"/>
+                      </a:rPr>
+                      <m:t>𝐴</m:t>
+                    </m:r>
+                    <m:r>
+                      <a:rPr lang="en-GB" b="0" i="1" smtClean="0">
+                        <a:latin typeface="Cambria Math" panose="02040503050406030204" pitchFamily="18" charset="0"/>
+                      </a:rPr>
+                      <m:t>1+</m:t>
+                    </m:r>
+                    <m:sSub>
+                      <m:sSubPr>
+                        <m:ctrlPr>
+                          <a:rPr lang="en-GB" b="0" i="1" smtClean="0">
+                            <a:latin typeface="Cambria Math" panose="02040503050406030204" pitchFamily="18" charset="0"/>
+                          </a:rPr>
+                        </m:ctrlPr>
+                      </m:sSubPr>
+                      <m:e>
+                        <m:r>
+                          <a:rPr lang="en-GB" b="0" i="1" smtClean="0">
+                            <a:latin typeface="Cambria Math" panose="02040503050406030204" pitchFamily="18" charset="0"/>
+                          </a:rPr>
+                          <m:t>𝛽</m:t>
+                        </m:r>
+                      </m:e>
+                      <m:sub>
+                        <m:r>
+                          <a:rPr lang="en-GB" b="0" i="1" smtClean="0">
+                            <a:latin typeface="Cambria Math" panose="02040503050406030204" pitchFamily="18" charset="0"/>
+                          </a:rPr>
+                          <m:t>2</m:t>
+                        </m:r>
+                      </m:sub>
+                    </m:sSub>
+                    <m:r>
+                      <a:rPr lang="en-GB" b="0" i="1" smtClean="0">
+                        <a:latin typeface="Cambria Math" panose="02040503050406030204" pitchFamily="18" charset="0"/>
+                      </a:rPr>
+                      <m:t>𝐴</m:t>
+                    </m:r>
+                    <m:r>
+                      <a:rPr lang="en-GB" b="0" i="1" smtClean="0">
+                        <a:latin typeface="Cambria Math" panose="02040503050406030204" pitchFamily="18" charset="0"/>
+                      </a:rPr>
+                      <m:t>2+</m:t>
+                    </m:r>
+                    <m:sSub>
+                      <m:sSubPr>
+                        <m:ctrlPr>
+                          <a:rPr lang="en-GB" b="0" i="1" smtClean="0">
+                            <a:latin typeface="Cambria Math" panose="02040503050406030204" pitchFamily="18" charset="0"/>
+                          </a:rPr>
+                        </m:ctrlPr>
+                      </m:sSubPr>
+                      <m:e>
+                        <m:r>
+                          <a:rPr lang="en-GB" b="0" i="1" smtClean="0">
+                            <a:latin typeface="Cambria Math" panose="02040503050406030204" pitchFamily="18" charset="0"/>
+                          </a:rPr>
+                          <m:t>𝛽</m:t>
+                        </m:r>
+                      </m:e>
+                      <m:sub>
+                        <m:r>
+                          <a:rPr lang="en-GB" b="0" i="1" smtClean="0">
+                            <a:latin typeface="Cambria Math" panose="02040503050406030204" pitchFamily="18" charset="0"/>
+                          </a:rPr>
+                          <m:t>3</m:t>
+                        </m:r>
+                      </m:sub>
+                    </m:sSub>
+                    <m:r>
+                      <a:rPr lang="en-GB" b="0" i="1" smtClean="0">
+                        <a:latin typeface="Cambria Math" panose="02040503050406030204" pitchFamily="18" charset="0"/>
+                      </a:rPr>
+                      <m:t>𝐴</m:t>
+                    </m:r>
+                    <m:r>
+                      <a:rPr lang="en-GB" b="0" i="1" smtClean="0">
+                        <a:latin typeface="Cambria Math" panose="02040503050406030204" pitchFamily="18" charset="0"/>
+                      </a:rPr>
+                      <m:t>3+</m:t>
+                    </m:r>
+                    <m:sSub>
+                      <m:sSubPr>
+                        <m:ctrlPr>
+                          <a:rPr lang="en-GB" b="0" i="1" smtClean="0">
+                            <a:latin typeface="Cambria Math" panose="02040503050406030204" pitchFamily="18" charset="0"/>
+                          </a:rPr>
+                        </m:ctrlPr>
+                      </m:sSubPr>
+                      <m:e>
+                        <m:r>
+                          <a:rPr lang="en-GB" b="0" i="1" smtClean="0">
+                            <a:latin typeface="Cambria Math" panose="02040503050406030204" pitchFamily="18" charset="0"/>
+                          </a:rPr>
+                          <m:t>𝛽</m:t>
+                        </m:r>
+                      </m:e>
+                      <m:sub>
+                        <m:r>
+                          <a:rPr lang="en-GB" b="0" i="1" smtClean="0">
+                            <a:latin typeface="Cambria Math" panose="02040503050406030204" pitchFamily="18" charset="0"/>
+                          </a:rPr>
+                          <m:t>4</m:t>
+                        </m:r>
+                      </m:sub>
+                    </m:sSub>
+                    <m:r>
+                      <a:rPr lang="en-GB" b="0" i="1" smtClean="0">
+                        <a:latin typeface="Cambria Math" panose="02040503050406030204" pitchFamily="18" charset="0"/>
+                      </a:rPr>
+                      <m:t>𝐴</m:t>
+                    </m:r>
+                    <m:r>
+                      <a:rPr lang="en-GB" b="0" i="1" smtClean="0">
+                        <a:latin typeface="Cambria Math" panose="02040503050406030204" pitchFamily="18" charset="0"/>
+                      </a:rPr>
+                      <m:t>4</m:t>
+                    </m:r>
+                  </m:oMath>
+                </a14:m>
+                <a:endParaRPr lang="en-US" dirty="0"/>
+              </a:p>
+              <a:p>
+                <a:r>
+                  <a:rPr lang="en-US" dirty="0"/>
+                  <a:t>Underfit models:</a:t>
+                </a:r>
+              </a:p>
+              <a:p>
+                <a:pPr lvl="1"/>
+                <a:r>
+                  <a:rPr lang="en-US" dirty="0"/>
+                  <a:t>Explains data very poorly</a:t>
+                </a:r>
+              </a:p>
+              <a:p>
+                <a:pPr lvl="1"/>
+                <a:r>
+                  <a:rPr lang="en-US" dirty="0"/>
+                  <a:t>But “costs” very few parameters</a:t>
+                </a:r>
+              </a:p>
+              <a:p>
+                <a:pPr lvl="2"/>
+                <a14:m>
+                  <m:oMath xmlns:m="http://schemas.openxmlformats.org/officeDocument/2006/math">
+                    <m:r>
+                      <a:rPr lang="en-GB" b="0" i="1" smtClean="0">
+                        <a:latin typeface="Cambria Math" panose="02040503050406030204" pitchFamily="18" charset="0"/>
+                      </a:rPr>
+                      <m:t>𝜇</m:t>
+                    </m:r>
+                    <m:r>
+                      <a:rPr lang="en-GB" b="0" i="1" smtClean="0">
+                        <a:latin typeface="Cambria Math" panose="02040503050406030204" pitchFamily="18" charset="0"/>
+                      </a:rPr>
+                      <m:t>=</m:t>
+                    </m:r>
+                    <m:sSub>
+                      <m:sSubPr>
+                        <m:ctrlPr>
+                          <a:rPr lang="en-GB" b="0" i="1" smtClean="0">
+                            <a:latin typeface="Cambria Math" panose="02040503050406030204" pitchFamily="18" charset="0"/>
+                          </a:rPr>
+                        </m:ctrlPr>
+                      </m:sSubPr>
+                      <m:e>
+                        <m:r>
+                          <a:rPr lang="en-GB" b="0" i="1" smtClean="0">
+                            <a:latin typeface="Cambria Math" panose="02040503050406030204" pitchFamily="18" charset="0"/>
+                          </a:rPr>
+                          <m:t>𝛽</m:t>
+                        </m:r>
+                      </m:e>
+                      <m:sub>
+                        <m:r>
+                          <a:rPr lang="en-GB" b="0" i="1" smtClean="0">
+                            <a:latin typeface="Cambria Math" panose="02040503050406030204" pitchFamily="18" charset="0"/>
+                          </a:rPr>
+                          <m:t>0</m:t>
+                        </m:r>
+                      </m:sub>
+                    </m:sSub>
+                  </m:oMath>
+                </a14:m>
+                <a:endParaRPr lang="en-US" dirty="0"/>
+              </a:p>
+            </p:txBody>
+          </p:sp>
+        </mc:Choice>
+        <mc:Fallback xmlns="">
+          <p:sp>
+            <p:nvSpPr>
+              <p:cNvPr id="3" name="Content Placeholder 2">
+                <a:extLst>
+                  <a:ext uri="{FF2B5EF4-FFF2-40B4-BE49-F238E27FC236}">
+                    <a16:creationId xmlns:a16="http://schemas.microsoft.com/office/drawing/2014/main" id="{3FF35B1B-5C22-837C-A327-D38BFC9F5157}"/>
+                  </a:ext>
+                </a:extLst>
+              </p:cNvPr>
+              <p:cNvSpPr>
+                <a:spLocks noGrp="1" noRot="1" noChangeAspect="1" noMove="1" noResize="1" noEditPoints="1" noAdjustHandles="1" noChangeArrowheads="1" noChangeShapeType="1" noTextEdit="1"/>
+              </p:cNvSpPr>
+              <p:nvPr>
+                <p:ph idx="1"/>
+              </p:nvPr>
+            </p:nvSpPr>
+            <p:spPr>
+              <a:blipFill>
+                <a:blip r:embed="rId2"/>
+                <a:stretch>
+                  <a:fillRect l="-1770"/>
+                </a:stretch>
+              </a:blipFill>
+            </p:spPr>
+            <p:txBody>
+              <a:bodyPr/>
+              <a:lstStyle/>
+              <a:p>
+                <a:r>
+                  <a:rPr lang="en-GB">
+                    <a:noFill/>
+                  </a:rPr>
+                  <a:t> </a:t>
+                </a:r>
+              </a:p>
+            </p:txBody>
+          </p:sp>
+        </mc:Fallback>
+      </mc:AlternateContent>
       <p:pic>
         <p:nvPicPr>
           <p:cNvPr id="5" name="Picture Placeholder 4" descr="A picture containing bedroom&#10;&#10;Description automatically generated">
@@ -7640,7 +8772,7 @@
           </p:nvPr>
         </p:nvPicPr>
         <p:blipFill>
-          <a:blip r:embed="rId2">
+          <a:blip r:embed="rId3">
             <a:extLst>
               <a:ext uri="{28A0092B-C50C-407E-A947-70E740481C1C}">
                 <a14:useLocalDpi xmlns:a14="http://schemas.microsoft.com/office/drawing/2010/main" val="0"/>
@@ -7662,6 +8794,78 @@
           </a:prstGeom>
         </p:spPr>
       </p:pic>
+      <p:pic>
+        <p:nvPicPr>
+          <p:cNvPr id="6" name="Picture 5" descr="A screen shot of a graph&#10;&#10;Description automatically generated">
+            <a:extLst>
+              <a:ext uri="{FF2B5EF4-FFF2-40B4-BE49-F238E27FC236}">
+                <a16:creationId xmlns:a16="http://schemas.microsoft.com/office/drawing/2014/main" id="{E010FF59-74AE-45D0-FFE4-7414139C9930}"/>
+              </a:ext>
+            </a:extLst>
+          </p:cNvPr>
+          <p:cNvPicPr>
+            <a:picLocks noChangeAspect="1"/>
+          </p:cNvPicPr>
+          <p:nvPr/>
+        </p:nvPicPr>
+        <p:blipFill>
+          <a:blip r:embed="rId4">
+            <a:extLst>
+              <a:ext uri="{28A0092B-C50C-407E-A947-70E740481C1C}">
+                <a14:useLocalDpi xmlns:a14="http://schemas.microsoft.com/office/drawing/2010/main" val="0"/>
+              </a:ext>
+            </a:extLst>
+          </a:blip>
+          <a:stretch>
+            <a:fillRect/>
+          </a:stretch>
+        </p:blipFill>
+        <p:spPr>
+          <a:xfrm>
+            <a:off x="6440129" y="0"/>
+            <a:ext cx="5751871" cy="6858000"/>
+          </a:xfrm>
+          <a:prstGeom prst="rect">
+            <a:avLst/>
+          </a:prstGeom>
+        </p:spPr>
+      </p:pic>
+      <p:pic>
+        <p:nvPicPr>
+          <p:cNvPr id="4" name="Picture 3" descr="A graph of height and length&#10;&#10;Description automatically generated">
+            <a:extLst>
+              <a:ext uri="{FF2B5EF4-FFF2-40B4-BE49-F238E27FC236}">
+                <a16:creationId xmlns:a16="http://schemas.microsoft.com/office/drawing/2014/main" id="{59ECFB5C-E36F-AD70-C189-112901608F56}"/>
+              </a:ext>
+            </a:extLst>
+          </p:cNvPr>
+          <p:cNvPicPr>
+            <a:picLocks noChangeAspect="1"/>
+          </p:cNvPicPr>
+          <p:nvPr/>
+        </p:nvPicPr>
+        <p:blipFill>
+          <a:blip r:embed="rId5">
+            <a:extLst>
+              <a:ext uri="{28A0092B-C50C-407E-A947-70E740481C1C}">
+                <a14:useLocalDpi xmlns:a14="http://schemas.microsoft.com/office/drawing/2010/main" val="0"/>
+              </a:ext>
+            </a:extLst>
+          </a:blip>
+          <a:stretch>
+            <a:fillRect/>
+          </a:stretch>
+        </p:blipFill>
+        <p:spPr>
+          <a:xfrm>
+            <a:off x="6440129" y="0"/>
+            <a:ext cx="5751871" cy="6858000"/>
+          </a:xfrm>
+          <a:prstGeom prst="rect">
+            <a:avLst/>
+          </a:prstGeom>
+        </p:spPr>
+      </p:pic>
     </p:spTree>
     <p:extLst>
       <p:ext uri="{BB962C8B-B14F-4D97-AF65-F5344CB8AC3E}">
@@ -7672,6 +8876,18 @@
   <p:clrMapOvr>
     <a:masterClrMapping/>
   </p:clrMapOvr>
+  <mc:AlternateContent xmlns:mc="http://schemas.openxmlformats.org/markup-compatibility/2006" xmlns:p14="http://schemas.microsoft.com/office/powerpoint/2010/main">
+    <mc:Choice Requires="p14">
+      <p:transition spd="med" p14:dur="700">
+        <p:fade/>
+      </p:transition>
+    </mc:Choice>
+    <mc:Fallback xmlns="">
+      <p:transition spd="med">
+        <p:fade/>
+      </p:transition>
+    </mc:Fallback>
+  </mc:AlternateContent>
   <p:timing>
     <p:tnLst>
       <p:par>
@@ -7693,14 +8909,92 @@
                             </p:stCondLst>
                             <p:childTnLst>
                               <p:par>
-                                <p:cTn id="5" presetID="10" presetClass="exit" presetSubtype="0" fill="hold" nodeType="clickEffect">
+                                <p:cTn id="5" presetID="10" presetClass="entr" presetSubtype="0" fill="hold" grpId="0" nodeType="clickEffect">
+                                  <p:stCondLst>
+                                    <p:cond delay="0"/>
+                                  </p:stCondLst>
+                                  <p:childTnLst>
+                                    <p:set>
+                                      <p:cBhvr>
+                                        <p:cTn id="6" dur="1" fill="hold">
+                                          <p:stCondLst>
+                                            <p:cond delay="0"/>
+                                          </p:stCondLst>
+                                        </p:cTn>
+                                        <p:tgtEl>
+                                          <p:spTgt spid="3">
+                                            <p:txEl>
+                                              <p:pRg st="0" end="0"/>
+                                            </p:txEl>
+                                          </p:spTgt>
+                                        </p:tgtEl>
+                                        <p:attrNameLst>
+                                          <p:attrName>style.visibility</p:attrName>
+                                        </p:attrNameLst>
+                                      </p:cBhvr>
+                                      <p:to>
+                                        <p:strVal val="visible"/>
+                                      </p:to>
+                                    </p:set>
+                                    <p:animEffect transition="in" filter="fade">
+                                      <p:cBhvr>
+                                        <p:cTn id="7" dur="500"/>
+                                        <p:tgtEl>
+                                          <p:spTgt spid="3">
+                                            <p:txEl>
+                                              <p:pRg st="0" end="0"/>
+                                            </p:txEl>
+                                          </p:spTgt>
+                                        </p:tgtEl>
+                                      </p:cBhvr>
+                                    </p:animEffect>
+                                  </p:childTnLst>
+                                </p:cTn>
+                              </p:par>
+                              <p:par>
+                                <p:cTn id="8" presetID="10" presetClass="entr" presetSubtype="0" fill="hold" nodeType="withEffect">
+                                  <p:stCondLst>
+                                    <p:cond delay="0"/>
+                                  </p:stCondLst>
+                                  <p:childTnLst>
+                                    <p:set>
+                                      <p:cBhvr>
+                                        <p:cTn id="9" dur="1" fill="hold">
+                                          <p:stCondLst>
+                                            <p:cond delay="0"/>
+                                          </p:stCondLst>
+                                        </p:cTn>
+                                        <p:tgtEl>
+                                          <p:spTgt spid="6"/>
+                                        </p:tgtEl>
+                                        <p:attrNameLst>
+                                          <p:attrName>style.visibility</p:attrName>
+                                        </p:attrNameLst>
+                                      </p:cBhvr>
+                                      <p:to>
+                                        <p:strVal val="visible"/>
+                                      </p:to>
+                                    </p:set>
+                                    <p:animEffect transition="in" filter="fade">
+                                      <p:cBhvr>
+                                        <p:cTn id="10" dur="500"/>
+                                        <p:tgtEl>
+                                          <p:spTgt spid="6"/>
+                                        </p:tgtEl>
+                                      </p:cBhvr>
+                                    </p:animEffect>
+                                  </p:childTnLst>
+                                </p:cTn>
+                              </p:par>
+                              <p:par>
+                                <p:cTn id="11" presetID="10" presetClass="exit" presetSubtype="0" fill="hold" nodeType="withEffect">
                                   <p:stCondLst>
                                     <p:cond delay="0"/>
                                   </p:stCondLst>
                                   <p:childTnLst>
                                     <p:animEffect transition="out" filter="fade">
                                       <p:cBhvr>
-                                        <p:cTn id="6" dur="500"/>
+                                        <p:cTn id="12" dur="500"/>
                                         <p:tgtEl>
                                           <p:spTgt spid="5"/>
                                         </p:tgtEl>
@@ -7708,7 +9002,7 @@
                                     </p:animEffect>
                                     <p:set>
                                       <p:cBhvr>
-                                        <p:cTn id="7" dur="1" fill="hold">
+                                        <p:cTn id="13" dur="1" fill="hold">
                                           <p:stCondLst>
                                             <p:cond delay="499"/>
                                           </p:stCondLst>
@@ -7724,6 +9018,468 @@
                                         <p:strVal val="hidden"/>
                                       </p:to>
                                     </p:set>
+                                  </p:childTnLst>
+                                </p:cTn>
+                              </p:par>
+                            </p:childTnLst>
+                          </p:cTn>
+                        </p:par>
+                      </p:childTnLst>
+                    </p:cTn>
+                  </p:par>
+                  <p:par>
+                    <p:cTn id="14" fill="hold">
+                      <p:stCondLst>
+                        <p:cond delay="indefinite"/>
+                      </p:stCondLst>
+                      <p:childTnLst>
+                        <p:par>
+                          <p:cTn id="15" fill="hold">
+                            <p:stCondLst>
+                              <p:cond delay="0"/>
+                            </p:stCondLst>
+                            <p:childTnLst>
+                              <p:par>
+                                <p:cTn id="16" presetID="10" presetClass="entr" presetSubtype="0" fill="hold" grpId="0" nodeType="clickEffect">
+                                  <p:stCondLst>
+                                    <p:cond delay="0"/>
+                                  </p:stCondLst>
+                                  <p:childTnLst>
+                                    <p:set>
+                                      <p:cBhvr>
+                                        <p:cTn id="17" dur="1" fill="hold">
+                                          <p:stCondLst>
+                                            <p:cond delay="0"/>
+                                          </p:stCondLst>
+                                        </p:cTn>
+                                        <p:tgtEl>
+                                          <p:spTgt spid="3">
+                                            <p:txEl>
+                                              <p:pRg st="1" end="1"/>
+                                            </p:txEl>
+                                          </p:spTgt>
+                                        </p:tgtEl>
+                                        <p:attrNameLst>
+                                          <p:attrName>style.visibility</p:attrName>
+                                        </p:attrNameLst>
+                                      </p:cBhvr>
+                                      <p:to>
+                                        <p:strVal val="visible"/>
+                                      </p:to>
+                                    </p:set>
+                                    <p:animEffect transition="in" filter="fade">
+                                      <p:cBhvr>
+                                        <p:cTn id="18" dur="500"/>
+                                        <p:tgtEl>
+                                          <p:spTgt spid="3">
+                                            <p:txEl>
+                                              <p:pRg st="1" end="1"/>
+                                            </p:txEl>
+                                          </p:spTgt>
+                                        </p:tgtEl>
+                                      </p:cBhvr>
+                                    </p:animEffect>
+                                  </p:childTnLst>
+                                </p:cTn>
+                              </p:par>
+                            </p:childTnLst>
+                          </p:cTn>
+                        </p:par>
+                      </p:childTnLst>
+                    </p:cTn>
+                  </p:par>
+                  <p:par>
+                    <p:cTn id="19" fill="hold">
+                      <p:stCondLst>
+                        <p:cond delay="indefinite"/>
+                      </p:stCondLst>
+                      <p:childTnLst>
+                        <p:par>
+                          <p:cTn id="20" fill="hold">
+                            <p:stCondLst>
+                              <p:cond delay="0"/>
+                            </p:stCondLst>
+                            <p:childTnLst>
+                              <p:par>
+                                <p:cTn id="21" presetID="10" presetClass="entr" presetSubtype="0" fill="hold" grpId="0" nodeType="clickEffect">
+                                  <p:stCondLst>
+                                    <p:cond delay="0"/>
+                                  </p:stCondLst>
+                                  <p:childTnLst>
+                                    <p:set>
+                                      <p:cBhvr>
+                                        <p:cTn id="22" dur="1" fill="hold">
+                                          <p:stCondLst>
+                                            <p:cond delay="0"/>
+                                          </p:stCondLst>
+                                        </p:cTn>
+                                        <p:tgtEl>
+                                          <p:spTgt spid="3">
+                                            <p:txEl>
+                                              <p:pRg st="2" end="2"/>
+                                            </p:txEl>
+                                          </p:spTgt>
+                                        </p:tgtEl>
+                                        <p:attrNameLst>
+                                          <p:attrName>style.visibility</p:attrName>
+                                        </p:attrNameLst>
+                                      </p:cBhvr>
+                                      <p:to>
+                                        <p:strVal val="visible"/>
+                                      </p:to>
+                                    </p:set>
+                                    <p:animEffect transition="in" filter="fade">
+                                      <p:cBhvr>
+                                        <p:cTn id="23" dur="500"/>
+                                        <p:tgtEl>
+                                          <p:spTgt spid="3">
+                                            <p:txEl>
+                                              <p:pRg st="2" end="2"/>
+                                            </p:txEl>
+                                          </p:spTgt>
+                                        </p:tgtEl>
+                                      </p:cBhvr>
+                                    </p:animEffect>
+                                  </p:childTnLst>
+                                </p:cTn>
+                              </p:par>
+                            </p:childTnLst>
+                          </p:cTn>
+                        </p:par>
+                      </p:childTnLst>
+                    </p:cTn>
+                  </p:par>
+                  <p:par>
+                    <p:cTn id="24" fill="hold">
+                      <p:stCondLst>
+                        <p:cond delay="indefinite"/>
+                      </p:stCondLst>
+                      <p:childTnLst>
+                        <p:par>
+                          <p:cTn id="25" fill="hold">
+                            <p:stCondLst>
+                              <p:cond delay="0"/>
+                            </p:stCondLst>
+                            <p:childTnLst>
+                              <p:par>
+                                <p:cTn id="26" presetID="10" presetClass="entr" presetSubtype="0" fill="hold" grpId="0" nodeType="clickEffect">
+                                  <p:stCondLst>
+                                    <p:cond delay="0"/>
+                                  </p:stCondLst>
+                                  <p:childTnLst>
+                                    <p:set>
+                                      <p:cBhvr>
+                                        <p:cTn id="27" dur="1" fill="hold">
+                                          <p:stCondLst>
+                                            <p:cond delay="0"/>
+                                          </p:stCondLst>
+                                        </p:cTn>
+                                        <p:tgtEl>
+                                          <p:spTgt spid="3">
+                                            <p:txEl>
+                                              <p:pRg st="3" end="3"/>
+                                            </p:txEl>
+                                          </p:spTgt>
+                                        </p:tgtEl>
+                                        <p:attrNameLst>
+                                          <p:attrName>style.visibility</p:attrName>
+                                        </p:attrNameLst>
+                                      </p:cBhvr>
+                                      <p:to>
+                                        <p:strVal val="visible"/>
+                                      </p:to>
+                                    </p:set>
+                                    <p:animEffect transition="in" filter="fade">
+                                      <p:cBhvr>
+                                        <p:cTn id="28" dur="500"/>
+                                        <p:tgtEl>
+                                          <p:spTgt spid="3">
+                                            <p:txEl>
+                                              <p:pRg st="3" end="3"/>
+                                            </p:txEl>
+                                          </p:spTgt>
+                                        </p:tgtEl>
+                                      </p:cBhvr>
+                                    </p:animEffect>
+                                  </p:childTnLst>
+                                </p:cTn>
+                              </p:par>
+                            </p:childTnLst>
+                          </p:cTn>
+                        </p:par>
+                      </p:childTnLst>
+                    </p:cTn>
+                  </p:par>
+                  <p:par>
+                    <p:cTn id="29" fill="hold">
+                      <p:stCondLst>
+                        <p:cond delay="indefinite"/>
+                      </p:stCondLst>
+                      <p:childTnLst>
+                        <p:par>
+                          <p:cTn id="30" fill="hold">
+                            <p:stCondLst>
+                              <p:cond delay="0"/>
+                            </p:stCondLst>
+                            <p:childTnLst>
+                              <p:par>
+                                <p:cTn id="31" presetID="10" presetClass="entr" presetSubtype="0" fill="hold" grpId="0" nodeType="clickEffect">
+                                  <p:stCondLst>
+                                    <p:cond delay="0"/>
+                                  </p:stCondLst>
+                                  <p:childTnLst>
+                                    <p:set>
+                                      <p:cBhvr>
+                                        <p:cTn id="32" dur="1" fill="hold">
+                                          <p:stCondLst>
+                                            <p:cond delay="0"/>
+                                          </p:stCondLst>
+                                        </p:cTn>
+                                        <p:tgtEl>
+                                          <p:spTgt spid="3">
+                                            <p:txEl>
+                                              <p:pRg st="4" end="4"/>
+                                            </p:txEl>
+                                          </p:spTgt>
+                                        </p:tgtEl>
+                                        <p:attrNameLst>
+                                          <p:attrName>style.visibility</p:attrName>
+                                        </p:attrNameLst>
+                                      </p:cBhvr>
+                                      <p:to>
+                                        <p:strVal val="visible"/>
+                                      </p:to>
+                                    </p:set>
+                                    <p:animEffect transition="in" filter="fade">
+                                      <p:cBhvr>
+                                        <p:cTn id="33" dur="500"/>
+                                        <p:tgtEl>
+                                          <p:spTgt spid="3">
+                                            <p:txEl>
+                                              <p:pRg st="4" end="4"/>
+                                            </p:txEl>
+                                          </p:spTgt>
+                                        </p:tgtEl>
+                                      </p:cBhvr>
+                                    </p:animEffect>
+                                  </p:childTnLst>
+                                </p:cTn>
+                              </p:par>
+                              <p:par>
+                                <p:cTn id="34" presetID="10" presetClass="entr" presetSubtype="0" fill="hold" nodeType="withEffect">
+                                  <p:stCondLst>
+                                    <p:cond delay="0"/>
+                                  </p:stCondLst>
+                                  <p:childTnLst>
+                                    <p:set>
+                                      <p:cBhvr>
+                                        <p:cTn id="35" dur="1" fill="hold">
+                                          <p:stCondLst>
+                                            <p:cond delay="0"/>
+                                          </p:stCondLst>
+                                        </p:cTn>
+                                        <p:tgtEl>
+                                          <p:spTgt spid="4"/>
+                                        </p:tgtEl>
+                                        <p:attrNameLst>
+                                          <p:attrName>style.visibility</p:attrName>
+                                        </p:attrNameLst>
+                                      </p:cBhvr>
+                                      <p:to>
+                                        <p:strVal val="visible"/>
+                                      </p:to>
+                                    </p:set>
+                                    <p:animEffect transition="in" filter="fade">
+                                      <p:cBhvr>
+                                        <p:cTn id="36" dur="500"/>
+                                        <p:tgtEl>
+                                          <p:spTgt spid="4"/>
+                                        </p:tgtEl>
+                                      </p:cBhvr>
+                                    </p:animEffect>
+                                  </p:childTnLst>
+                                </p:cTn>
+                              </p:par>
+                            </p:childTnLst>
+                          </p:cTn>
+                        </p:par>
+                      </p:childTnLst>
+                    </p:cTn>
+                  </p:par>
+                  <p:par>
+                    <p:cTn id="37" fill="hold">
+                      <p:stCondLst>
+                        <p:cond delay="indefinite"/>
+                      </p:stCondLst>
+                      <p:childTnLst>
+                        <p:par>
+                          <p:cTn id="38" fill="hold">
+                            <p:stCondLst>
+                              <p:cond delay="0"/>
+                            </p:stCondLst>
+                            <p:childTnLst>
+                              <p:par>
+                                <p:cTn id="39" presetID="10" presetClass="entr" presetSubtype="0" fill="hold" grpId="0" nodeType="clickEffect">
+                                  <p:stCondLst>
+                                    <p:cond delay="0"/>
+                                  </p:stCondLst>
+                                  <p:childTnLst>
+                                    <p:set>
+                                      <p:cBhvr>
+                                        <p:cTn id="40" dur="1" fill="hold">
+                                          <p:stCondLst>
+                                            <p:cond delay="0"/>
+                                          </p:stCondLst>
+                                        </p:cTn>
+                                        <p:tgtEl>
+                                          <p:spTgt spid="3">
+                                            <p:txEl>
+                                              <p:pRg st="5" end="5"/>
+                                            </p:txEl>
+                                          </p:spTgt>
+                                        </p:tgtEl>
+                                        <p:attrNameLst>
+                                          <p:attrName>style.visibility</p:attrName>
+                                        </p:attrNameLst>
+                                      </p:cBhvr>
+                                      <p:to>
+                                        <p:strVal val="visible"/>
+                                      </p:to>
+                                    </p:set>
+                                    <p:animEffect transition="in" filter="fade">
+                                      <p:cBhvr>
+                                        <p:cTn id="41" dur="500"/>
+                                        <p:tgtEl>
+                                          <p:spTgt spid="3">
+                                            <p:txEl>
+                                              <p:pRg st="5" end="5"/>
+                                            </p:txEl>
+                                          </p:spTgt>
+                                        </p:tgtEl>
+                                      </p:cBhvr>
+                                    </p:animEffect>
+                                  </p:childTnLst>
+                                </p:cTn>
+                              </p:par>
+                            </p:childTnLst>
+                          </p:cTn>
+                        </p:par>
+                      </p:childTnLst>
+                    </p:cTn>
+                  </p:par>
+                  <p:par>
+                    <p:cTn id="42" fill="hold">
+                      <p:stCondLst>
+                        <p:cond delay="indefinite"/>
+                      </p:stCondLst>
+                      <p:childTnLst>
+                        <p:par>
+                          <p:cTn id="43" fill="hold">
+                            <p:stCondLst>
+                              <p:cond delay="0"/>
+                            </p:stCondLst>
+                            <p:childTnLst>
+                              <p:par>
+                                <p:cTn id="44" presetID="10" presetClass="entr" presetSubtype="0" fill="hold" grpId="0" nodeType="clickEffect">
+                                  <p:stCondLst>
+                                    <p:cond delay="0"/>
+                                  </p:stCondLst>
+                                  <p:childTnLst>
+                                    <p:set>
+                                      <p:cBhvr>
+                                        <p:cTn id="45" dur="1" fill="hold">
+                                          <p:stCondLst>
+                                            <p:cond delay="0"/>
+                                          </p:stCondLst>
+                                        </p:cTn>
+                                        <p:tgtEl>
+                                          <p:spTgt spid="3">
+                                            <p:txEl>
+                                              <p:pRg st="6" end="6"/>
+                                            </p:txEl>
+                                          </p:spTgt>
+                                        </p:tgtEl>
+                                        <p:attrNameLst>
+                                          <p:attrName>style.visibility</p:attrName>
+                                        </p:attrNameLst>
+                                      </p:cBhvr>
+                                      <p:to>
+                                        <p:strVal val="visible"/>
+                                      </p:to>
+                                    </p:set>
+                                    <p:animEffect transition="in" filter="fade">
+                                      <p:cBhvr>
+                                        <p:cTn id="46" dur="500"/>
+                                        <p:tgtEl>
+                                          <p:spTgt spid="3">
+                                            <p:txEl>
+                                              <p:pRg st="6" end="6"/>
+                                            </p:txEl>
+                                          </p:spTgt>
+                                        </p:tgtEl>
+                                      </p:cBhvr>
+                                    </p:animEffect>
+                                  </p:childTnLst>
+                                </p:cTn>
+                              </p:par>
+                            </p:childTnLst>
+                          </p:cTn>
+                        </p:par>
+                      </p:childTnLst>
+                    </p:cTn>
+                  </p:par>
+                  <p:par>
+                    <p:cTn id="47" fill="hold">
+                      <p:stCondLst>
+                        <p:cond delay="indefinite"/>
+                      </p:stCondLst>
+                      <p:childTnLst>
+                        <p:par>
+                          <p:cTn id="48" fill="hold">
+                            <p:stCondLst>
+                              <p:cond delay="0"/>
+                            </p:stCondLst>
+                            <p:childTnLst>
+                              <p:par>
+                                <p:cTn id="49" presetID="10" presetClass="entr" presetSubtype="0" fill="hold" grpId="0" nodeType="clickEffect">
+                                  <p:stCondLst>
+                                    <p:cond delay="0"/>
+                                  </p:stCondLst>
+                                  <p:childTnLst>
+                                    <p:set>
+                                      <p:cBhvr>
+                                        <p:cTn id="50" dur="1" fill="hold">
+                                          <p:stCondLst>
+                                            <p:cond delay="0"/>
+                                          </p:stCondLst>
+                                        </p:cTn>
+                                        <p:tgtEl>
+                                          <p:spTgt spid="3">
+                                            <p:txEl>
+                                              <p:pRg st="7" end="7"/>
+                                            </p:txEl>
+                                          </p:spTgt>
+                                        </p:tgtEl>
+                                        <p:attrNameLst>
+                                          <p:attrName>style.visibility</p:attrName>
+                                        </p:attrNameLst>
+                                      </p:cBhvr>
+                                      <p:to>
+                                        <p:strVal val="visible"/>
+                                      </p:to>
+                                    </p:set>
+                                    <p:animEffect transition="in" filter="fade">
+                                      <p:cBhvr>
+                                        <p:cTn id="51" dur="500"/>
+                                        <p:tgtEl>
+                                          <p:spTgt spid="3">
+                                            <p:txEl>
+                                              <p:pRg st="7" end="7"/>
+                                            </p:txEl>
+                                          </p:spTgt>
+                                        </p:tgtEl>
+                                      </p:cBhvr>
+                                    </p:animEffect>
                                   </p:childTnLst>
                                 </p:cTn>
                               </p:par>
@@ -7754,6 +9510,9 @@
         </p:cTn>
       </p:par>
     </p:tnLst>
+    <p:bldLst>
+      <p:bldP spid="3" grpId="0" uiExpand="1" build="p"/>
+    </p:bldLst>
   </p:timing>
 </p:sld>
 </file>
@@ -7995,6 +9754,18 @@
   <p:clrMapOvr>
     <a:masterClrMapping/>
   </p:clrMapOvr>
+  <mc:AlternateContent xmlns:mc="http://schemas.openxmlformats.org/markup-compatibility/2006" xmlns:p14="http://schemas.microsoft.com/office/powerpoint/2010/main">
+    <mc:Choice Requires="p14">
+      <p:transition spd="med" p14:dur="700">
+        <p:fade/>
+      </p:transition>
+    </mc:Choice>
+    <mc:Fallback xmlns="">
+      <p:transition spd="med">
+        <p:fade/>
+      </p:transition>
+    </mc:Fallback>
+  </mc:AlternateContent>
   <p:timing>
     <p:tnLst>
       <p:par>
@@ -8016,7 +9787,7 @@
                             </p:stCondLst>
                             <p:childTnLst>
                               <p:par>
-                                <p:cTn id="5" presetID="1" presetClass="entr" presetSubtype="0" fill="hold" grpId="0" nodeType="clickEffect">
+                                <p:cTn id="5" presetID="10" presetClass="entr" presetSubtype="0" fill="hold" grpId="0" nodeType="clickEffect">
                                   <p:stCondLst>
                                     <p:cond delay="0"/>
                                   </p:stCondLst>
@@ -8043,6 +9814,18 @@
                                         <p:strVal val="visible"/>
                                       </p:to>
                                     </p:set>
+                                    <p:animEffect transition="in" filter="fade">
+                                      <p:cBhvr>
+                                        <p:cTn id="7" dur="500"/>
+                                        <p:tgtEl>
+                                          <p:spTgt spid="3">
+                                            <p:txEl>
+                                              <p:pRg st="0" end="0"/>
+                                            </p:txEl>
+                                          </p:spTgt>
+                                        </p:tgtEl>
+                                      </p:cBhvr>
+                                    </p:animEffect>
                                   </p:childTnLst>
                                 </p:cTn>
                               </p:par>
@@ -8053,26 +9836,26 @@
                     </p:cTn>
                   </p:par>
                   <p:par>
-                    <p:cTn id="7" fill="hold">
+                    <p:cTn id="8" fill="hold">
                       <p:stCondLst>
                         <p:cond delay="indefinite"/>
                       </p:stCondLst>
                       <p:childTnLst>
                         <p:par>
-                          <p:cTn id="8" fill="hold">
+                          <p:cTn id="9" fill="hold">
                             <p:stCondLst>
                               <p:cond delay="0"/>
                             </p:stCondLst>
                             <p:childTnLst>
                               <p:par>
-                                <p:cTn id="9" presetID="1" presetClass="entr" presetSubtype="0" fill="hold" grpId="0" nodeType="clickEffect">
+                                <p:cTn id="10" presetID="10" presetClass="entr" presetSubtype="0" fill="hold" grpId="0" nodeType="clickEffect">
                                   <p:stCondLst>
                                     <p:cond delay="0"/>
                                   </p:stCondLst>
                                   <p:childTnLst>
                                     <p:set>
                                       <p:cBhvr>
-                                        <p:cTn id="10" dur="1" fill="hold">
+                                        <p:cTn id="11" dur="1" fill="hold">
                                           <p:stCondLst>
                                             <p:cond delay="0"/>
                                           </p:stCondLst>
@@ -8092,6 +9875,18 @@
                                         <p:strVal val="visible"/>
                                       </p:to>
                                     </p:set>
+                                    <p:animEffect transition="in" filter="fade">
+                                      <p:cBhvr>
+                                        <p:cTn id="12" dur="500"/>
+                                        <p:tgtEl>
+                                          <p:spTgt spid="3">
+                                            <p:txEl>
+                                              <p:pRg st="1" end="1"/>
+                                            </p:txEl>
+                                          </p:spTgt>
+                                        </p:tgtEl>
+                                      </p:cBhvr>
+                                    </p:animEffect>
                                   </p:childTnLst>
                                 </p:cTn>
                               </p:par>
@@ -8102,26 +9897,26 @@
                     </p:cTn>
                   </p:par>
                   <p:par>
-                    <p:cTn id="11" fill="hold">
+                    <p:cTn id="13" fill="hold">
                       <p:stCondLst>
                         <p:cond delay="indefinite"/>
                       </p:stCondLst>
                       <p:childTnLst>
                         <p:par>
-                          <p:cTn id="12" fill="hold">
+                          <p:cTn id="14" fill="hold">
                             <p:stCondLst>
                               <p:cond delay="0"/>
                             </p:stCondLst>
                             <p:childTnLst>
                               <p:par>
-                                <p:cTn id="13" presetID="1" presetClass="entr" presetSubtype="0" fill="hold" nodeType="clickEffect">
+                                <p:cTn id="15" presetID="10" presetClass="entr" presetSubtype="0" fill="hold" nodeType="clickEffect">
                                   <p:stCondLst>
                                     <p:cond delay="0"/>
                                   </p:stCondLst>
                                   <p:childTnLst>
                                     <p:set>
                                       <p:cBhvr>
-                                        <p:cTn id="14" dur="1" fill="hold">
+                                        <p:cTn id="16" dur="1" fill="hold">
                                           <p:stCondLst>
                                             <p:cond delay="0"/>
                                           </p:stCondLst>
@@ -8137,18 +9932,26 @@
                                         <p:strVal val="visible"/>
                                       </p:to>
                                     </p:set>
+                                    <p:animEffect transition="in" filter="fade">
+                                      <p:cBhvr>
+                                        <p:cTn id="17" dur="500"/>
+                                        <p:tgtEl>
+                                          <p:spTgt spid="53"/>
+                                        </p:tgtEl>
+                                      </p:cBhvr>
+                                    </p:animEffect>
                                   </p:childTnLst>
                                 </p:cTn>
                               </p:par>
                               <p:par>
-                                <p:cTn id="15" presetID="1" presetClass="entr" presetSubtype="0" fill="hold" grpId="0" nodeType="withEffect">
+                                <p:cTn id="18" presetID="10" presetClass="entr" presetSubtype="0" fill="hold" grpId="0" nodeType="withEffect">
                                   <p:stCondLst>
                                     <p:cond delay="0"/>
                                   </p:stCondLst>
                                   <p:childTnLst>
                                     <p:set>
                                       <p:cBhvr>
-                                        <p:cTn id="16" dur="1" fill="hold">
+                                        <p:cTn id="19" dur="1" fill="hold">
                                           <p:stCondLst>
                                             <p:cond delay="0"/>
                                           </p:stCondLst>
@@ -8164,18 +9967,26 @@
                                         <p:strVal val="visible"/>
                                       </p:to>
                                     </p:set>
+                                    <p:animEffect transition="in" filter="fade">
+                                      <p:cBhvr>
+                                        <p:cTn id="20" dur="500"/>
+                                        <p:tgtEl>
+                                          <p:spTgt spid="54"/>
+                                        </p:tgtEl>
+                                      </p:cBhvr>
+                                    </p:animEffect>
                                   </p:childTnLst>
                                 </p:cTn>
                               </p:par>
                               <p:par>
-                                <p:cTn id="17" presetID="1" presetClass="entr" presetSubtype="0" fill="hold" grpId="0" nodeType="withEffect">
+                                <p:cTn id="21" presetID="10" presetClass="entr" presetSubtype="0" fill="hold" grpId="0" nodeType="withEffect">
                                   <p:stCondLst>
                                     <p:cond delay="0"/>
                                   </p:stCondLst>
                                   <p:childTnLst>
                                     <p:set>
                                       <p:cBhvr>
-                                        <p:cTn id="18" dur="1" fill="hold">
+                                        <p:cTn id="22" dur="1" fill="hold">
                                           <p:stCondLst>
                                             <p:cond delay="0"/>
                                           </p:stCondLst>
@@ -8195,18 +10006,30 @@
                                         <p:strVal val="visible"/>
                                       </p:to>
                                     </p:set>
+                                    <p:animEffect transition="in" filter="fade">
+                                      <p:cBhvr>
+                                        <p:cTn id="23" dur="500"/>
+                                        <p:tgtEl>
+                                          <p:spTgt spid="3">
+                                            <p:txEl>
+                                              <p:pRg st="2" end="2"/>
+                                            </p:txEl>
+                                          </p:spTgt>
+                                        </p:tgtEl>
+                                      </p:cBhvr>
+                                    </p:animEffect>
                                   </p:childTnLst>
                                 </p:cTn>
                               </p:par>
                               <p:par>
-                                <p:cTn id="19" presetID="1" presetClass="entr" presetSubtype="0" fill="hold" grpId="0" nodeType="withEffect">
+                                <p:cTn id="24" presetID="10" presetClass="entr" presetSubtype="0" fill="hold" grpId="0" nodeType="withEffect">
                                   <p:stCondLst>
                                     <p:cond delay="0"/>
                                   </p:stCondLst>
                                   <p:childTnLst>
                                     <p:set>
                                       <p:cBhvr>
-                                        <p:cTn id="20" dur="1" fill="hold">
+                                        <p:cTn id="25" dur="1" fill="hold">
                                           <p:stCondLst>
                                             <p:cond delay="0"/>
                                           </p:stCondLst>
@@ -8226,6 +10049,18 @@
                                         <p:strVal val="visible"/>
                                       </p:to>
                                     </p:set>
+                                    <p:animEffect transition="in" filter="fade">
+                                      <p:cBhvr>
+                                        <p:cTn id="26" dur="500"/>
+                                        <p:tgtEl>
+                                          <p:spTgt spid="3">
+                                            <p:txEl>
+                                              <p:pRg st="3" end="3"/>
+                                            </p:txEl>
+                                          </p:spTgt>
+                                        </p:tgtEl>
+                                      </p:cBhvr>
+                                    </p:animEffect>
                                   </p:childTnLst>
                                 </p:cTn>
                               </p:par>
@@ -8236,26 +10071,26 @@
                     </p:cTn>
                   </p:par>
                   <p:par>
-                    <p:cTn id="21" fill="hold">
+                    <p:cTn id="27" fill="hold">
                       <p:stCondLst>
                         <p:cond delay="indefinite"/>
                       </p:stCondLst>
                       <p:childTnLst>
                         <p:par>
-                          <p:cTn id="22" fill="hold">
+                          <p:cTn id="28" fill="hold">
                             <p:stCondLst>
                               <p:cond delay="0"/>
                             </p:stCondLst>
                             <p:childTnLst>
                               <p:par>
-                                <p:cTn id="23" presetID="1" presetClass="entr" presetSubtype="0" fill="hold" grpId="0" nodeType="clickEffect">
+                                <p:cTn id="29" presetID="10" presetClass="entr" presetSubtype="0" fill="hold" grpId="0" nodeType="clickEffect">
                                   <p:stCondLst>
                                     <p:cond delay="0"/>
                                   </p:stCondLst>
                                   <p:childTnLst>
                                     <p:set>
                                       <p:cBhvr>
-                                        <p:cTn id="24" dur="1" fill="hold">
+                                        <p:cTn id="30" dur="1" fill="hold">
                                           <p:stCondLst>
                                             <p:cond delay="0"/>
                                           </p:stCondLst>
@@ -8275,18 +10110,30 @@
                                         <p:strVal val="visible"/>
                                       </p:to>
                                     </p:set>
+                                    <p:animEffect transition="in" filter="fade">
+                                      <p:cBhvr>
+                                        <p:cTn id="31" dur="500"/>
+                                        <p:tgtEl>
+                                          <p:spTgt spid="3">
+                                            <p:txEl>
+                                              <p:pRg st="4" end="4"/>
+                                            </p:txEl>
+                                          </p:spTgt>
+                                        </p:tgtEl>
+                                      </p:cBhvr>
+                                    </p:animEffect>
                                   </p:childTnLst>
                                 </p:cTn>
                               </p:par>
                               <p:par>
-                                <p:cTn id="25" presetID="1" presetClass="entr" presetSubtype="0" fill="hold" grpId="0" nodeType="withEffect">
+                                <p:cTn id="32" presetID="10" presetClass="entr" presetSubtype="0" fill="hold" grpId="0" nodeType="withEffect">
                                   <p:stCondLst>
                                     <p:cond delay="0"/>
                                   </p:stCondLst>
                                   <p:childTnLst>
                                     <p:set>
                                       <p:cBhvr>
-                                        <p:cTn id="26" dur="1" fill="hold">
+                                        <p:cTn id="33" dur="1" fill="hold">
                                           <p:stCondLst>
                                             <p:cond delay="0"/>
                                           </p:stCondLst>
@@ -8306,6 +10153,18 @@
                                         <p:strVal val="visible"/>
                                       </p:to>
                                     </p:set>
+                                    <p:animEffect transition="in" filter="fade">
+                                      <p:cBhvr>
+                                        <p:cTn id="34" dur="500"/>
+                                        <p:tgtEl>
+                                          <p:spTgt spid="3">
+                                            <p:txEl>
+                                              <p:pRg st="5" end="5"/>
+                                            </p:txEl>
+                                          </p:spTgt>
+                                        </p:tgtEl>
+                                      </p:cBhvr>
+                                    </p:animEffect>
                                   </p:childTnLst>
                                 </p:cTn>
                               </p:par>
@@ -8414,7 +10273,7 @@
         <p:spPr>
           <a:xfrm>
             <a:off x="838200" y="1825625"/>
-            <a:ext cx="10515600" cy="1908175"/>
+            <a:ext cx="10515600" cy="1080537"/>
           </a:xfrm>
         </p:spPr>
         <p:txBody>
@@ -8424,19 +10283,6 @@
             <a:r>
               <a:rPr lang="en-GB" dirty="0"/>
               <a:t>To do so, we use the best Likelihood (MLE) value (“rating”) for each of the different models that we’ve run.</a:t>
-            </a:r>
-          </a:p>
-          <a:p>
-            <a:r>
-              <a:rPr lang="en-GB" dirty="0"/>
-              <a:t>Though we need to tweak the Likelihood</a:t>
-            </a:r>
-          </a:p>
-          <a:p>
-            <a:pPr lvl="1"/>
-            <a:r>
-              <a:rPr lang="en-GB" dirty="0"/>
-              <a:t>(and we’ll use this to choose which house we’ll buy)</a:t>
             </a:r>
           </a:p>
         </p:txBody>
@@ -8468,8 +10314,8 @@
         </p:blipFill>
         <p:spPr>
           <a:xfrm>
-            <a:off x="3336022" y="3584417"/>
-            <a:ext cx="5519955" cy="3273583"/>
+            <a:off x="2451864" y="2734147"/>
+            <a:ext cx="6953692" cy="4123853"/>
           </a:xfrm>
           <a:prstGeom prst="rect">
             <a:avLst/>
@@ -8486,6 +10332,18 @@
   <p:clrMapOvr>
     <a:masterClrMapping/>
   </p:clrMapOvr>
+  <mc:AlternateContent xmlns:mc="http://schemas.openxmlformats.org/markup-compatibility/2006" xmlns:p14="http://schemas.microsoft.com/office/powerpoint/2010/main">
+    <mc:Choice Requires="p14">
+      <p:transition spd="med" p14:dur="700">
+        <p:fade/>
+      </p:transition>
+    </mc:Choice>
+    <mc:Fallback xmlns="">
+      <p:transition spd="med">
+        <p:fade/>
+      </p:transition>
+    </mc:Fallback>
+  </mc:AlternateContent>
   <p:timing>
     <p:tnLst>
       <p:par>
@@ -8581,11 +10439,7 @@
                                           </p:stCondLst>
                                         </p:cTn>
                                         <p:tgtEl>
-                                          <p:spTgt spid="3">
-                                            <p:txEl>
-                                              <p:pRg st="1" end="1"/>
-                                            </p:txEl>
-                                          </p:spTgt>
+                                          <p:spTgt spid="7"/>
                                         </p:tgtEl>
                                         <p:attrNameLst>
                                           <p:attrName>style.visibility</p:attrName>
@@ -8598,106 +10452,6 @@
                                     <p:animEffect transition="in" filter="fade">
                                       <p:cBhvr>
                                         <p:cTn id="12" dur="500"/>
-                                        <p:tgtEl>
-                                          <p:spTgt spid="3">
-                                            <p:txEl>
-                                              <p:pRg st="1" end="1"/>
-                                            </p:txEl>
-                                          </p:spTgt>
-                                        </p:tgtEl>
-                                      </p:cBhvr>
-                                    </p:animEffect>
-                                  </p:childTnLst>
-                                </p:cTn>
-                              </p:par>
-                              <p:par>
-                                <p:cTn id="13" presetID="10" presetClass="entr" presetSubtype="0" fill="hold" nodeType="withEffect">
-                                  <p:stCondLst>
-                                    <p:cond delay="0"/>
-                                  </p:stCondLst>
-                                  <p:childTnLst>
-                                    <p:set>
-                                      <p:cBhvr>
-                                        <p:cTn id="14" dur="1" fill="hold">
-                                          <p:stCondLst>
-                                            <p:cond delay="0"/>
-                                          </p:stCondLst>
-                                        </p:cTn>
-                                        <p:tgtEl>
-                                          <p:spTgt spid="3">
-                                            <p:txEl>
-                                              <p:pRg st="2" end="2"/>
-                                            </p:txEl>
-                                          </p:spTgt>
-                                        </p:tgtEl>
-                                        <p:attrNameLst>
-                                          <p:attrName>style.visibility</p:attrName>
-                                        </p:attrNameLst>
-                                      </p:cBhvr>
-                                      <p:to>
-                                        <p:strVal val="visible"/>
-                                      </p:to>
-                                    </p:set>
-                                    <p:animEffect transition="in" filter="fade">
-                                      <p:cBhvr>
-                                        <p:cTn id="15" dur="500"/>
-                                        <p:tgtEl>
-                                          <p:spTgt spid="3">
-                                            <p:txEl>
-                                              <p:pRg st="2" end="2"/>
-                                            </p:txEl>
-                                          </p:spTgt>
-                                        </p:tgtEl>
-                                      </p:cBhvr>
-                                    </p:animEffect>
-                                  </p:childTnLst>
-                                </p:cTn>
-                              </p:par>
-                            </p:childTnLst>
-                          </p:cTn>
-                        </p:par>
-                      </p:childTnLst>
-                    </p:cTn>
-                  </p:par>
-                  <p:par>
-                    <p:cTn id="16" fill="hold">
-                      <p:stCondLst>
-                        <p:cond delay="indefinite"/>
-                      </p:stCondLst>
-                      <p:childTnLst>
-                        <p:par>
-                          <p:cTn id="17" fill="hold">
-                            <p:stCondLst>
-                              <p:cond delay="0"/>
-                            </p:stCondLst>
-                            <p:childTnLst>
-                              <p:par>
-                                <p:cTn id="18" presetID="10" presetClass="entr" presetSubtype="0" fill="hold" nodeType="clickEffect">
-                                  <p:stCondLst>
-                                    <p:cond delay="0"/>
-                                  </p:stCondLst>
-                                  <p:childTnLst>
-                                    <p:set>
-                                      <p:cBhvr>
-                                        <p:cTn id="19" dur="1" fill="hold">
-                                          <p:stCondLst>
-                                            <p:cond delay="0"/>
-                                          </p:stCondLst>
-                                        </p:cTn>
-                                        <p:tgtEl>
-                                          <p:spTgt spid="7"/>
-                                        </p:tgtEl>
-                                        <p:attrNameLst>
-                                          <p:attrName>style.visibility</p:attrName>
-                                        </p:attrNameLst>
-                                      </p:cBhvr>
-                                      <p:to>
-                                        <p:strVal val="visible"/>
-                                      </p:to>
-                                    </p:set>
-                                    <p:animEffect transition="in" filter="fade">
-                                      <p:cBhvr>
-                                        <p:cTn id="20" dur="500"/>
                                         <p:tgtEl>
                                           <p:spTgt spid="7"/>
                                         </p:tgtEl>
@@ -9015,6 +10769,18 @@
   <p:clrMapOvr>
     <a:masterClrMapping/>
   </p:clrMapOvr>
+  <mc:AlternateContent xmlns:mc="http://schemas.openxmlformats.org/markup-compatibility/2006" xmlns:p14="http://schemas.microsoft.com/office/powerpoint/2010/main">
+    <mc:Choice Requires="p14">
+      <p:transition spd="med" p14:dur="700">
+        <p:fade/>
+      </p:transition>
+    </mc:Choice>
+    <mc:Fallback xmlns="">
+      <p:transition spd="med">
+        <p:fade/>
+      </p:transition>
+    </mc:Fallback>
+  </mc:AlternateContent>
   <p:timing>
     <p:tnLst>
       <p:par>
@@ -9607,31 +11373,45 @@
           </a:p>
         </p:txBody>
       </p:sp>
-      <p:sp>
-        <p:nvSpPr>
-          <p:cNvPr id="4" name="Picture Placeholder 3">
+      <p:pic>
+        <p:nvPicPr>
+          <p:cNvPr id="5" name="Picture Placeholder 4" descr="A graph on a black background&#10;&#10;Description automatically generated">
             <a:extLst>
               <a:ext uri="{FF2B5EF4-FFF2-40B4-BE49-F238E27FC236}">
-                <a16:creationId xmlns:a16="http://schemas.microsoft.com/office/drawing/2014/main" id="{127C9BEA-FD06-7A1F-2A4A-BD61CF27F719}"/>
+                <a16:creationId xmlns:a16="http://schemas.microsoft.com/office/drawing/2014/main" id="{0915B139-2770-9A89-B097-51489B75F66B}"/>
               </a:ext>
             </a:extLst>
           </p:cNvPr>
-          <p:cNvSpPr>
-            <a:spLocks noGrp="1"/>
-          </p:cNvSpPr>
+          <p:cNvPicPr>
+            <a:picLocks noGrp="1" noChangeAspect="1"/>
+          </p:cNvPicPr>
           <p:nvPr>
             <p:ph type="pic" sz="quarter" idx="10"/>
           </p:nvPr>
-        </p:nvSpPr>
-        <p:spPr/>
-        <p:txBody>
-          <a:bodyPr/>
-          <a:lstStyle/>
-          <a:p>
-            <a:endParaRPr lang="en-GB"/>
-          </a:p>
-        </p:txBody>
-      </p:sp>
+        </p:nvPicPr>
+        <p:blipFill>
+          <a:blip r:embed="rId2">
+            <a:extLst>
+              <a:ext uri="{28A0092B-C50C-407E-A947-70E740481C1C}">
+                <a14:useLocalDpi xmlns:a14="http://schemas.microsoft.com/office/drawing/2010/main" val="0"/>
+              </a:ext>
+            </a:extLst>
+          </a:blip>
+          <a:srcRect t="691" b="691"/>
+          <a:stretch>
+            <a:fillRect/>
+          </a:stretch>
+        </p:blipFill>
+        <p:spPr>
+          <a:xfrm>
+            <a:off x="6359525" y="0"/>
+            <a:ext cx="5832475" cy="6858000"/>
+          </a:xfrm>
+          <a:prstGeom prst="rect">
+            <a:avLst/>
+          </a:prstGeom>
+        </p:spPr>
+      </p:pic>
     </p:spTree>
     <p:extLst>
       <p:ext uri="{BB962C8B-B14F-4D97-AF65-F5344CB8AC3E}">
@@ -9642,6 +11422,234 @@
   <p:clrMapOvr>
     <a:masterClrMapping/>
   </p:clrMapOvr>
+  <mc:AlternateContent xmlns:mc="http://schemas.openxmlformats.org/markup-compatibility/2006" xmlns:p14="http://schemas.microsoft.com/office/powerpoint/2010/main">
+    <mc:Choice Requires="p14">
+      <p:transition spd="med" p14:dur="700">
+        <p:fade/>
+      </p:transition>
+    </mc:Choice>
+    <mc:Fallback xmlns="">
+      <p:transition spd="med">
+        <p:fade/>
+      </p:transition>
+    </mc:Fallback>
+  </mc:AlternateContent>
+  <p:timing>
+    <p:tnLst>
+      <p:par>
+        <p:cTn id="1" dur="indefinite" restart="never" nodeType="tmRoot">
+          <p:childTnLst>
+            <p:seq concurrent="1" nextAc="seek">
+              <p:cTn id="2" dur="indefinite" nodeType="mainSeq">
+                <p:childTnLst>
+                  <p:par>
+                    <p:cTn id="3" fill="hold">
+                      <p:stCondLst>
+                        <p:cond delay="indefinite"/>
+                      </p:stCondLst>
+                      <p:childTnLst>
+                        <p:par>
+                          <p:cTn id="4" fill="hold">
+                            <p:stCondLst>
+                              <p:cond delay="0"/>
+                            </p:stCondLst>
+                            <p:childTnLst>
+                              <p:par>
+                                <p:cTn id="5" presetID="10" presetClass="entr" presetSubtype="0" fill="hold" grpId="0" nodeType="clickEffect">
+                                  <p:stCondLst>
+                                    <p:cond delay="0"/>
+                                  </p:stCondLst>
+                                  <p:childTnLst>
+                                    <p:set>
+                                      <p:cBhvr>
+                                        <p:cTn id="6" dur="1" fill="hold">
+                                          <p:stCondLst>
+                                            <p:cond delay="0"/>
+                                          </p:stCondLst>
+                                        </p:cTn>
+                                        <p:tgtEl>
+                                          <p:spTgt spid="3">
+                                            <p:txEl>
+                                              <p:pRg st="0" end="0"/>
+                                            </p:txEl>
+                                          </p:spTgt>
+                                        </p:tgtEl>
+                                        <p:attrNameLst>
+                                          <p:attrName>style.visibility</p:attrName>
+                                        </p:attrNameLst>
+                                      </p:cBhvr>
+                                      <p:to>
+                                        <p:strVal val="visible"/>
+                                      </p:to>
+                                    </p:set>
+                                    <p:animEffect transition="in" filter="fade">
+                                      <p:cBhvr>
+                                        <p:cTn id="7" dur="500"/>
+                                        <p:tgtEl>
+                                          <p:spTgt spid="3">
+                                            <p:txEl>
+                                              <p:pRg st="0" end="0"/>
+                                            </p:txEl>
+                                          </p:spTgt>
+                                        </p:tgtEl>
+                                      </p:cBhvr>
+                                    </p:animEffect>
+                                  </p:childTnLst>
+                                </p:cTn>
+                              </p:par>
+                            </p:childTnLst>
+                          </p:cTn>
+                        </p:par>
+                      </p:childTnLst>
+                    </p:cTn>
+                  </p:par>
+                  <p:par>
+                    <p:cTn id="8" fill="hold">
+                      <p:stCondLst>
+                        <p:cond delay="indefinite"/>
+                      </p:stCondLst>
+                      <p:childTnLst>
+                        <p:par>
+                          <p:cTn id="9" fill="hold">
+                            <p:stCondLst>
+                              <p:cond delay="0"/>
+                            </p:stCondLst>
+                            <p:childTnLst>
+                              <p:par>
+                                <p:cTn id="10" presetID="10" presetClass="entr" presetSubtype="0" fill="hold" grpId="0" nodeType="clickEffect">
+                                  <p:stCondLst>
+                                    <p:cond delay="0"/>
+                                  </p:stCondLst>
+                                  <p:childTnLst>
+                                    <p:set>
+                                      <p:cBhvr>
+                                        <p:cTn id="11" dur="1" fill="hold">
+                                          <p:stCondLst>
+                                            <p:cond delay="0"/>
+                                          </p:stCondLst>
+                                        </p:cTn>
+                                        <p:tgtEl>
+                                          <p:spTgt spid="3">
+                                            <p:txEl>
+                                              <p:pRg st="1" end="1"/>
+                                            </p:txEl>
+                                          </p:spTgt>
+                                        </p:tgtEl>
+                                        <p:attrNameLst>
+                                          <p:attrName>style.visibility</p:attrName>
+                                        </p:attrNameLst>
+                                      </p:cBhvr>
+                                      <p:to>
+                                        <p:strVal val="visible"/>
+                                      </p:to>
+                                    </p:set>
+                                    <p:animEffect transition="in" filter="fade">
+                                      <p:cBhvr>
+                                        <p:cTn id="12" dur="500"/>
+                                        <p:tgtEl>
+                                          <p:spTgt spid="3">
+                                            <p:txEl>
+                                              <p:pRg st="1" end="1"/>
+                                            </p:txEl>
+                                          </p:spTgt>
+                                        </p:tgtEl>
+                                      </p:cBhvr>
+                                    </p:animEffect>
+                                  </p:childTnLst>
+                                </p:cTn>
+                              </p:par>
+                            </p:childTnLst>
+                          </p:cTn>
+                        </p:par>
+                      </p:childTnLst>
+                    </p:cTn>
+                  </p:par>
+                  <p:par>
+                    <p:cTn id="13" fill="hold">
+                      <p:stCondLst>
+                        <p:cond delay="indefinite"/>
+                      </p:stCondLst>
+                      <p:childTnLst>
+                        <p:par>
+                          <p:cTn id="14" fill="hold">
+                            <p:stCondLst>
+                              <p:cond delay="0"/>
+                            </p:stCondLst>
+                            <p:childTnLst>
+                              <p:par>
+                                <p:cTn id="15" presetID="10" presetClass="entr" presetSubtype="0" fill="hold" grpId="0" nodeType="clickEffect">
+                                  <p:stCondLst>
+                                    <p:cond delay="0"/>
+                                  </p:stCondLst>
+                                  <p:childTnLst>
+                                    <p:set>
+                                      <p:cBhvr>
+                                        <p:cTn id="16" dur="1" fill="hold">
+                                          <p:stCondLst>
+                                            <p:cond delay="0"/>
+                                          </p:stCondLst>
+                                        </p:cTn>
+                                        <p:tgtEl>
+                                          <p:spTgt spid="3">
+                                            <p:txEl>
+                                              <p:pRg st="2" end="2"/>
+                                            </p:txEl>
+                                          </p:spTgt>
+                                        </p:tgtEl>
+                                        <p:attrNameLst>
+                                          <p:attrName>style.visibility</p:attrName>
+                                        </p:attrNameLst>
+                                      </p:cBhvr>
+                                      <p:to>
+                                        <p:strVal val="visible"/>
+                                      </p:to>
+                                    </p:set>
+                                    <p:animEffect transition="in" filter="fade">
+                                      <p:cBhvr>
+                                        <p:cTn id="17" dur="500"/>
+                                        <p:tgtEl>
+                                          <p:spTgt spid="3">
+                                            <p:txEl>
+                                              <p:pRg st="2" end="2"/>
+                                            </p:txEl>
+                                          </p:spTgt>
+                                        </p:tgtEl>
+                                      </p:cBhvr>
+                                    </p:animEffect>
+                                  </p:childTnLst>
+                                </p:cTn>
+                              </p:par>
+                            </p:childTnLst>
+                          </p:cTn>
+                        </p:par>
+                      </p:childTnLst>
+                    </p:cTn>
+                  </p:par>
+                </p:childTnLst>
+              </p:cTn>
+              <p:prevCondLst>
+                <p:cond evt="onPrev" delay="0">
+                  <p:tgtEl>
+                    <p:sldTgt/>
+                  </p:tgtEl>
+                </p:cond>
+              </p:prevCondLst>
+              <p:nextCondLst>
+                <p:cond evt="onNext" delay="0">
+                  <p:tgtEl>
+                    <p:sldTgt/>
+                  </p:tgtEl>
+                </p:cond>
+              </p:nextCondLst>
+            </p:seq>
+          </p:childTnLst>
+        </p:cTn>
+      </p:par>
+    </p:tnLst>
+    <p:bldLst>
+      <p:bldP spid="3" grpId="0" build="p"/>
+    </p:bldLst>
+  </p:timing>
 </p:sld>
 </file>
 
@@ -10101,6 +12109,18 @@
   <p:clrMapOvr>
     <a:masterClrMapping/>
   </p:clrMapOvr>
+  <mc:AlternateContent xmlns:mc="http://schemas.openxmlformats.org/markup-compatibility/2006" xmlns:p14="http://schemas.microsoft.com/office/powerpoint/2010/main">
+    <mc:Choice Requires="p14">
+      <p:transition spd="med" p14:dur="700">
+        <p:fade/>
+      </p:transition>
+    </mc:Choice>
+    <mc:Fallback xmlns="">
+      <p:transition spd="med">
+        <p:fade/>
+      </p:transition>
+    </mc:Fallback>
+  </mc:AlternateContent>
   <p:timing>
     <p:tnLst>
       <p:par>
@@ -10486,8 +12506,8 @@
           <a:chExt cx="0" cy="0"/>
         </a:xfrm>
       </p:grpSpPr>
-      <mc:AlternateContent xmlns:mc="http://schemas.openxmlformats.org/markup-compatibility/2006">
-        <mc:Choice xmlns:a14="http://schemas.microsoft.com/office/drawing/2010/main" Requires="a14">
+      <mc:AlternateContent xmlns:mc="http://schemas.openxmlformats.org/markup-compatibility/2006" xmlns:a14="http://schemas.microsoft.com/office/drawing/2010/main">
+        <mc:Choice Requires="a14">
           <p:graphicFrame>
             <p:nvGraphicFramePr>
               <p:cNvPr id="6" name="Table 6">
@@ -11710,7 +13730,7 @@
             </a:graphic>
           </p:graphicFrame>
         </mc:Choice>
-        <mc:Fallback>
+        <mc:Fallback xmlns="">
           <p:graphicFrame>
             <p:nvGraphicFramePr>
               <p:cNvPr id="6" name="Table 6">
@@ -12383,8 +14403,8 @@
           </a:p>
         </p:txBody>
       </p:sp>
-      <mc:AlternateContent xmlns:mc="http://schemas.openxmlformats.org/markup-compatibility/2006">
-        <mc:Choice xmlns:a14="http://schemas.microsoft.com/office/drawing/2010/main" Requires="a14">
+      <mc:AlternateContent xmlns:mc="http://schemas.openxmlformats.org/markup-compatibility/2006" xmlns:a14="http://schemas.microsoft.com/office/drawing/2010/main">
+        <mc:Choice Requires="a14">
           <p:sp>
             <p:nvSpPr>
               <p:cNvPr id="10" name="TextBox 9">
@@ -12467,7 +14487,7 @@
             </p:txBody>
           </p:sp>
         </mc:Choice>
-        <mc:Fallback>
+        <mc:Fallback xmlns="">
           <p:sp>
             <p:nvSpPr>
               <p:cNvPr id="10" name="TextBox 9">
@@ -12792,6 +14812,18 @@
   <p:clrMapOvr>
     <a:masterClrMapping/>
   </p:clrMapOvr>
+  <mc:AlternateContent xmlns:mc="http://schemas.openxmlformats.org/markup-compatibility/2006" xmlns:p14="http://schemas.microsoft.com/office/powerpoint/2010/main">
+    <mc:Choice Requires="p14">
+      <p:transition spd="med" p14:dur="700">
+        <p:fade/>
+      </p:transition>
+    </mc:Choice>
+    <mc:Fallback xmlns="">
+      <p:transition spd="med">
+        <p:fade/>
+      </p:transition>
+    </mc:Fallback>
+  </mc:AlternateContent>
   <p:timing>
     <p:tnLst>
       <p:par>
